--- a/pptx/Module18_Exécution_et_évaluation_tests.pptx
+++ b/pptx/Module18_Exécution_et_évaluation_tests.pptx
@@ -12,9 +12,10 @@
     <p:sldId id="260" r:id="rId6"/>
     <p:sldId id="261" r:id="rId7"/>
     <p:sldId id="262" r:id="rId8"/>
+    <p:sldId id="263" r:id="rId9"/>
   </p:sldIdLst>
   <p:notesMasterIdLst>
-    <p:notesMasterId r:id="rId9"/>
+    <p:notesMasterId r:id="rId10"/>
   </p:notesMasterIdLst>
   <p:sldSz cx="9144000" cy="5143500"/>
   <p:notesSz cx="5143500" cy="9144000"/>
@@ -596,7 +597,7 @@
           <a:p>
             <a:r>
               <a:rPr lang="en-US" dirty="0"/>
-              <a:t>L'exécution est systématique. Chaque test, un par un, documenté.</a:t>
+              <a:t>L'exécution est systématique. Un par un, documenté.</a:t>
             </a:r>
             <a:endParaRPr lang="en-US" dirty="0"/>
           </a:p>
@@ -684,7 +685,7 @@
           <a:p>
             <a:r>
               <a:rPr lang="en-US" dirty="0"/>
-              <a:t>Un bug corrigé peut en créer un autre ! D'où les tests de régression.</a:t>
+              <a:t>Insister sur le cycle et les tests de régression.</a:t>
             </a:r>
             <a:endParaRPr lang="en-US" dirty="0"/>
           </a:p>
@@ -772,7 +773,7 @@
           <a:p>
             <a:r>
               <a:rPr lang="en-US" dirty="0"/>
-              <a:t>M4 est le critère Merit. Il faut aller au-delà de la simple exécution et ANALYSER.</a:t>
+              <a:t>M4 = Merit. Aller au-delà de l'exécution et ANALYSER.</a:t>
             </a:r>
             <a:endParaRPr lang="en-US" dirty="0"/>
           </a:p>
@@ -860,7 +861,7 @@
           <a:p>
             <a:r>
               <a:rPr lang="en-US" dirty="0"/>
-              <a:t>Ce module clôture la LO3. L'étudiant a un plan de test exécuté et évalué.</a:t>
+              <a:t>Vérifier que tout est complet avant de passer à LO4.</a:t>
             </a:r>
             <a:endParaRPr lang="en-US" dirty="0"/>
           </a:p>
@@ -948,7 +949,7 @@
           <a:p>
             <a:r>
               <a:rPr lang="en-US" dirty="0"/>
-              <a:t/>
+              <a:t>Ce module clôture la LO3.</a:t>
             </a:r>
             <a:endParaRPr lang="en-US" dirty="0"/>
           </a:p>
@@ -1060,6 +1061,94 @@
             <a:fld id="{F7021451-1387-4CA6-816F-3879F97B5CBC}" type="slidenum">
               <a:rPr lang="en-US"/>
               <a:t>7</a:t>
+            </a:fld>
+            <a:endParaRPr lang="en-US"/>
+          </a:p>
+        </p:txBody>
+      </p:sp>
+    </p:spTree>
+    <p:extLst>
+      <p:ext uri="{BB962C8B-B14F-4D97-AF65-F5344CB8AC3E}">
+        <p14:creationId xmlns:p14="http://schemas.microsoft.com/office/powerpoint/2010/main" val="1024086991"/>
+      </p:ext>
+    </p:extLst>
+  </p:cSld>
+  <p:clrMapOvr>
+    <a:masterClrMapping/>
+  </p:clrMapOvr>
+</p:notes>
+</file>
+
+<file path=ppt/notesSlides/notesSlide8.xml><?xml version="1.0" encoding="utf-8"?>
+<p:notes xmlns:a="http://schemas.openxmlformats.org/drawingml/2006/main" xmlns:r="http://schemas.openxmlformats.org/officeDocument/2006/relationships" xmlns:p="http://schemas.openxmlformats.org/presentationml/2006/main">
+  <p:cSld>
+    <p:spTree>
+      <p:nvGrpSpPr>
+        <p:cNvPr id="1" name=""/>
+        <p:cNvGrpSpPr/>
+        <p:nvPr/>
+      </p:nvGrpSpPr>
+      <p:grpSpPr>
+        <a:xfrm>
+          <a:off x="0" y="0"/>
+          <a:ext cx="0" cy="0"/>
+          <a:chOff x="0" y="0"/>
+          <a:chExt cx="0" cy="0"/>
+        </a:xfrm>
+      </p:grpSpPr>
+      <p:sp>
+        <p:nvSpPr>
+          <p:cNvPr id="2" name="Slide Image Placeholder 1"/>
+          <p:cNvSpPr>
+            <a:spLocks noGrp="1" noRot="1" noChangeAspect="1"/>
+          </p:cNvSpPr>
+          <p:nvPr>
+            <p:ph type="sldImg"/>
+          </p:nvPr>
+        </p:nvSpPr>
+        <p:spPr/>
+      </p:sp>
+      <p:sp>
+        <p:nvSpPr>
+          <p:cNvPr id="3" name="Notes Placeholder 2"/>
+          <p:cNvSpPr>
+            <a:spLocks noGrp="1"/>
+          </p:cNvSpPr>
+          <p:nvPr>
+            <p:ph type="body" idx="1"/>
+          </p:nvPr>
+        </p:nvSpPr>
+        <p:spPr/>
+        <p:txBody>
+          <a:bodyPr/>
+          <a:lstStyle/>
+          <a:p>
+            <a:r>
+              <a:rPr lang="en-US" dirty="0"/>
+              <a:t/>
+            </a:r>
+            <a:endParaRPr lang="en-US" dirty="0"/>
+          </a:p>
+        </p:txBody>
+      </p:sp>
+      <p:sp>
+        <p:nvSpPr>
+          <p:cNvPr id="4" name="Slide Number Placeholder 3"/>
+          <p:cNvSpPr>
+            <a:spLocks noGrp="1"/>
+          </p:cNvSpPr>
+          <p:nvPr>
+            <p:ph type="sldNum" sz="quarter" idx="10"/>
+          </p:nvPr>
+        </p:nvSpPr>
+        <p:spPr/>
+        <p:txBody>
+          <a:bodyPr/>
+          <a:lstStyle/>
+          <a:p>
+            <a:fld id="{F7021451-1387-4CA6-816F-3879F97B5CBC}" type="slidenum">
+              <a:rPr lang="en-US"/>
+              <a:t>8</a:t>
             </a:fld>
             <a:endParaRPr lang="en-US"/>
           </a:p>
@@ -1517,7 +1606,7 @@
               <a:buNone/>
             </a:pPr>
             <a:r>
-              <a:rPr lang="en-US" sz="3200" b="1" dirty="0">
+              <a:rPr lang="en-US" sz="3000" b="1" dirty="0">
                 <a:solidFill>
                   <a:srgbClr val="FFFFFF"/>
                 </a:solidFill>
@@ -1525,9 +1614,9 @@
                 <a:ea typeface="Trebuchet MS" pitchFamily="34" charset="-122"/>
                 <a:cs typeface="Trebuchet MS" pitchFamily="34" charset="-120"/>
               </a:rPr>
-              <a:t>Exécution et évaluation tests</a:t>
-            </a:r>
-            <a:endParaRPr lang="en-US" sz="3200" dirty="0"/>
+              <a:t>Execution et evaluation des tests</a:t>
+            </a:r>
+            <a:endParaRPr lang="en-US" sz="3000" dirty="0"/>
           </a:p>
         </p:txBody>
       </p:sp>
@@ -1556,7 +1645,7 @@
               <a:buNone/>
             </a:pPr>
             <a:r>
-              <a:rPr lang="en-US" sz="1500" dirty="0">
+              <a:rPr lang="en-US" sz="1400" dirty="0">
                 <a:solidFill>
                   <a:srgbClr val="CCCCCC"/>
                 </a:solidFill>
@@ -1564,9 +1653,9 @@
                 <a:ea typeface="Calibri" pitchFamily="34" charset="-122"/>
                 <a:cs typeface="Calibri" pitchFamily="34" charset="-120"/>
               </a:rPr>
-              <a:t>Exécuter · Corriger · Évaluer efficacité</a:t>
-            </a:r>
-            <a:endParaRPr lang="en-US" sz="1500" dirty="0"/>
+              <a:t>Executer, corriger, regression, couverture, M4</a:t>
+            </a:r>
+            <a:endParaRPr lang="en-US" sz="1400" dirty="0"/>
           </a:p>
         </p:txBody>
       </p:sp>
@@ -1670,7 +1759,7 @@
         <p:spPr>
           <a:xfrm>
             <a:off x="457200" y="182880"/>
-            <a:ext cx="8229600" cy="594360"/>
+            <a:ext cx="8229600" cy="548640"/>
           </a:xfrm>
           <a:prstGeom prst="rect">
             <a:avLst/>
@@ -1686,7 +1775,7 @@
               <a:buNone/>
             </a:pPr>
             <a:r>
-              <a:rPr lang="en-US" sz="2400" b="1" dirty="0">
+              <a:rPr lang="en-US" sz="2200" b="1" dirty="0">
                 <a:solidFill>
                   <a:srgbClr val="BF360C"/>
                 </a:solidFill>
@@ -1694,9 +1783,9 @@
                 <a:ea typeface="Trebuchet MS" pitchFamily="34" charset="-122"/>
                 <a:cs typeface="Trebuchet MS" pitchFamily="34" charset="-120"/>
               </a:rPr>
-              <a:t>Exécuter les tests</a:t>
-            </a:r>
-            <a:endParaRPr lang="en-US" sz="2400" dirty="0"/>
+              <a:t>Executer les tests — methode</a:t>
+            </a:r>
+            <a:endParaRPr lang="en-US" sz="2200" dirty="0"/>
           </a:p>
         </p:txBody>
       </p:sp>
@@ -1708,8 +1797,8 @@
         </p:nvSpPr>
         <p:spPr>
           <a:xfrm>
-            <a:off x="457200" y="914400"/>
-            <a:ext cx="8229600" cy="464058"/>
+            <a:off x="457200" y="868680"/>
+            <a:ext cx="8229600" cy="475488"/>
           </a:xfrm>
           <a:prstGeom prst="rect">
             <a:avLst/>
@@ -1718,13 +1807,6 @@
             <a:srgbClr val="FFFFFF"/>
           </a:solidFill>
           <a:ln/>
-          <a:effectLst>
-            <a:outerShdw sx="100000" sy="100000" kx="0" ky="0" algn="bl" rotWithShape="0" blurRad="50800" dist="25400" dir="8100000">
-              <a:srgbClr val="000000">
-                <a:alpha val="12000"/>
-              </a:srgbClr>
-            </a:outerShdw>
-          </a:effectLst>
         </p:spPr>
       </p:sp>
       <p:sp>
@@ -1735,8 +1817,8 @@
         </p:nvSpPr>
         <p:spPr>
           <a:xfrm>
-            <a:off x="457200" y="914400"/>
-            <a:ext cx="45720" cy="464058"/>
+            <a:off x="457200" y="868680"/>
+            <a:ext cx="45720" cy="475488"/>
           </a:xfrm>
           <a:prstGeom prst="rect">
             <a:avLst/>
@@ -1755,8 +1837,8 @@
         </p:nvSpPr>
         <p:spPr>
           <a:xfrm>
-            <a:off x="685800" y="914400"/>
-            <a:ext cx="7818120" cy="464058"/>
+            <a:off x="640080" y="868680"/>
+            <a:ext cx="7863840" cy="475488"/>
           </a:xfrm>
           <a:prstGeom prst="rect">
             <a:avLst/>
@@ -1772,7 +1854,7 @@
               <a:buNone/>
             </a:pPr>
             <a:r>
-              <a:rPr lang="en-US" sz="1200" dirty="0">
+              <a:rPr lang="en-US" sz="1100" dirty="0">
                 <a:solidFill>
                   <a:srgbClr val="1A1A2E"/>
                 </a:solidFill>
@@ -1780,9 +1862,9 @@
                 <a:ea typeface="Calibri" pitchFamily="34" charset="-122"/>
                 <a:cs typeface="Calibri" pitchFamily="34" charset="-120"/>
               </a:rPr>
-              <a:t>Ouvrir HeidiSQL, se connecter à swisssound</a:t>
-            </a:r>
-            <a:endParaRPr lang="en-US" sz="1200" dirty="0"/>
+              <a:t>Pour chaque cas du plan (Module 17) :</a:t>
+            </a:r>
+            <a:endParaRPr lang="en-US" sz="1100" dirty="0"/>
           </a:p>
         </p:txBody>
       </p:sp>
@@ -1794,8 +1876,8 @@
         </p:nvSpPr>
         <p:spPr>
           <a:xfrm>
-            <a:off x="457200" y="1405890"/>
-            <a:ext cx="8229600" cy="464058"/>
+            <a:off x="457200" y="1371600"/>
+            <a:ext cx="8229600" cy="475488"/>
           </a:xfrm>
           <a:prstGeom prst="rect">
             <a:avLst/>
@@ -1804,13 +1886,6 @@
             <a:srgbClr val="FFF3E0"/>
           </a:solidFill>
           <a:ln/>
-          <a:effectLst>
-            <a:outerShdw sx="100000" sy="100000" kx="0" ky="0" algn="bl" rotWithShape="0" blurRad="50800" dist="25400" dir="8100000">
-              <a:srgbClr val="000000">
-                <a:alpha val="12000"/>
-              </a:srgbClr>
-            </a:outerShdw>
-          </a:effectLst>
         </p:spPr>
       </p:sp>
       <p:sp>
@@ -1821,8 +1896,8 @@
         </p:nvSpPr>
         <p:spPr>
           <a:xfrm>
-            <a:off x="457200" y="1405890"/>
-            <a:ext cx="45720" cy="464058"/>
+            <a:off x="457200" y="1371600"/>
+            <a:ext cx="45720" cy="475488"/>
           </a:xfrm>
           <a:prstGeom prst="rect">
             <a:avLst/>
@@ -1841,8 +1916,8 @@
         </p:nvSpPr>
         <p:spPr>
           <a:xfrm>
-            <a:off x="685800" y="1405890"/>
-            <a:ext cx="7818120" cy="464058"/>
+            <a:off x="640080" y="1371600"/>
+            <a:ext cx="7863840" cy="475488"/>
           </a:xfrm>
           <a:prstGeom prst="rect">
             <a:avLst/>
@@ -1858,7 +1933,7 @@
               <a:buNone/>
             </a:pPr>
             <a:r>
-              <a:rPr lang="en-US" sz="1200" dirty="0">
+              <a:rPr lang="en-US" sz="1100" dirty="0">
                 <a:solidFill>
                   <a:srgbClr val="1A1A2E"/>
                 </a:solidFill>
@@ -1866,9 +1941,9 @@
                 <a:ea typeface="Calibri" pitchFamily="34" charset="-122"/>
                 <a:cs typeface="Calibri" pitchFamily="34" charset="-120"/>
               </a:rPr>
-              <a:t>Pour chaque cas de test du plan (Module 17) :</a:t>
-            </a:r>
-            <a:endParaRPr lang="en-US" sz="1200" dirty="0"/>
+              <a:t>1. Executer l'entree dans HeidiSQL (INSERT, SELECT, GRANT...)</a:t>
+            </a:r>
+            <a:endParaRPr lang="en-US" sz="1100" dirty="0"/>
           </a:p>
         </p:txBody>
       </p:sp>
@@ -1880,8 +1955,8 @@
         </p:nvSpPr>
         <p:spPr>
           <a:xfrm>
-            <a:off x="457200" y="1897380"/>
-            <a:ext cx="8229600" cy="464058"/>
+            <a:off x="457200" y="1874520"/>
+            <a:ext cx="8229600" cy="475488"/>
           </a:xfrm>
           <a:prstGeom prst="rect">
             <a:avLst/>
@@ -1890,13 +1965,6 @@
             <a:srgbClr val="FFFFFF"/>
           </a:solidFill>
           <a:ln/>
-          <a:effectLst>
-            <a:outerShdw sx="100000" sy="100000" kx="0" ky="0" algn="bl" rotWithShape="0" blurRad="50800" dist="25400" dir="8100000">
-              <a:srgbClr val="000000">
-                <a:alpha val="12000"/>
-              </a:srgbClr>
-            </a:outerShdw>
-          </a:effectLst>
         </p:spPr>
       </p:sp>
       <p:sp>
@@ -1907,8 +1975,8 @@
         </p:nvSpPr>
         <p:spPr>
           <a:xfrm>
-            <a:off x="457200" y="1897380"/>
-            <a:ext cx="45720" cy="464058"/>
+            <a:off x="457200" y="1874520"/>
+            <a:ext cx="45720" cy="475488"/>
           </a:xfrm>
           <a:prstGeom prst="rect">
             <a:avLst/>
@@ -1927,8 +1995,8 @@
         </p:nvSpPr>
         <p:spPr>
           <a:xfrm>
-            <a:off x="685800" y="1897380"/>
-            <a:ext cx="7818120" cy="464058"/>
+            <a:off x="640080" y="1874520"/>
+            <a:ext cx="7863840" cy="475488"/>
           </a:xfrm>
           <a:prstGeom prst="rect">
             <a:avLst/>
@@ -1944,7 +2012,7 @@
               <a:buNone/>
             </a:pPr>
             <a:r>
-              <a:rPr lang="en-US" sz="1200" dirty="0">
+              <a:rPr lang="en-US" sz="1100" dirty="0">
                 <a:solidFill>
                   <a:srgbClr val="1A1A2E"/>
                 </a:solidFill>
@@ -1952,9 +2020,9 @@
                 <a:ea typeface="Calibri" pitchFamily="34" charset="-122"/>
                 <a:cs typeface="Calibri" pitchFamily="34" charset="-120"/>
               </a:rPr>
-              <a:t>1. Exécuter l'entrée (INSERT, SELECT, GRANT...)</a:t>
-            </a:r>
-            <a:endParaRPr lang="en-US" sz="1200" dirty="0"/>
+              <a:t>2. Noter le resultat OBTENU (message, nb lignes, erreur)</a:t>
+            </a:r>
+            <a:endParaRPr lang="en-US" sz="1100" dirty="0"/>
           </a:p>
         </p:txBody>
       </p:sp>
@@ -1966,8 +2034,8 @@
         </p:nvSpPr>
         <p:spPr>
           <a:xfrm>
-            <a:off x="457200" y="2388870"/>
-            <a:ext cx="8229600" cy="464058"/>
+            <a:off x="457200" y="2377440"/>
+            <a:ext cx="8229600" cy="475488"/>
           </a:xfrm>
           <a:prstGeom prst="rect">
             <a:avLst/>
@@ -1976,13 +2044,6 @@
             <a:srgbClr val="FFF3E0"/>
           </a:solidFill>
           <a:ln/>
-          <a:effectLst>
-            <a:outerShdw sx="100000" sy="100000" kx="0" ky="0" algn="bl" rotWithShape="0" blurRad="50800" dist="25400" dir="8100000">
-              <a:srgbClr val="000000">
-                <a:alpha val="12000"/>
-              </a:srgbClr>
-            </a:outerShdw>
-          </a:effectLst>
         </p:spPr>
       </p:sp>
       <p:sp>
@@ -1993,8 +2054,8 @@
         </p:nvSpPr>
         <p:spPr>
           <a:xfrm>
-            <a:off x="457200" y="2388870"/>
-            <a:ext cx="45720" cy="464058"/>
+            <a:off x="457200" y="2377440"/>
+            <a:ext cx="45720" cy="475488"/>
           </a:xfrm>
           <a:prstGeom prst="rect">
             <a:avLst/>
@@ -2013,8 +2074,8 @@
         </p:nvSpPr>
         <p:spPr>
           <a:xfrm>
-            <a:off x="685800" y="2388870"/>
-            <a:ext cx="7818120" cy="464058"/>
+            <a:off x="640080" y="2377440"/>
+            <a:ext cx="7863840" cy="475488"/>
           </a:xfrm>
           <a:prstGeom prst="rect">
             <a:avLst/>
@@ -2030,7 +2091,7 @@
               <a:buNone/>
             </a:pPr>
             <a:r>
-              <a:rPr lang="en-US" sz="1200" dirty="0">
+              <a:rPr lang="en-US" sz="1100" dirty="0">
                 <a:solidFill>
                   <a:srgbClr val="1A1A2E"/>
                 </a:solidFill>
@@ -2038,9 +2099,9 @@
                 <a:ea typeface="Calibri" pitchFamily="34" charset="-122"/>
                 <a:cs typeface="Calibri" pitchFamily="34" charset="-120"/>
               </a:rPr>
-              <a:t>2. Noter le résultat OBTENU (message, nb lignes, erreur)</a:t>
-            </a:r>
-            <a:endParaRPr lang="en-US" sz="1200" dirty="0"/>
+              <a:t>3. Comparer avec le resultat ATTENDU</a:t>
+            </a:r>
+            <a:endParaRPr lang="en-US" sz="1100" dirty="0"/>
           </a:p>
         </p:txBody>
       </p:sp>
@@ -2053,7 +2114,7 @@
         <p:spPr>
           <a:xfrm>
             <a:off x="457200" y="2880360"/>
-            <a:ext cx="8229600" cy="464058"/>
+            <a:ext cx="8229600" cy="475488"/>
           </a:xfrm>
           <a:prstGeom prst="rect">
             <a:avLst/>
@@ -2062,13 +2123,6 @@
             <a:srgbClr val="FFFFFF"/>
           </a:solidFill>
           <a:ln/>
-          <a:effectLst>
-            <a:outerShdw sx="100000" sy="100000" kx="0" ky="0" algn="bl" rotWithShape="0" blurRad="50800" dist="25400" dir="8100000">
-              <a:srgbClr val="000000">
-                <a:alpha val="12000"/>
-              </a:srgbClr>
-            </a:outerShdw>
-          </a:effectLst>
         </p:spPr>
       </p:sp>
       <p:sp>
@@ -2080,7 +2134,7 @@
         <p:spPr>
           <a:xfrm>
             <a:off x="457200" y="2880360"/>
-            <a:ext cx="45720" cy="464058"/>
+            <a:ext cx="45720" cy="475488"/>
           </a:xfrm>
           <a:prstGeom prst="rect">
             <a:avLst/>
@@ -2099,8 +2153,8 @@
         </p:nvSpPr>
         <p:spPr>
           <a:xfrm>
-            <a:off x="685800" y="2880360"/>
-            <a:ext cx="7818120" cy="464058"/>
+            <a:off x="640080" y="2880360"/>
+            <a:ext cx="7863840" cy="475488"/>
           </a:xfrm>
           <a:prstGeom prst="rect">
             <a:avLst/>
@@ -2116,7 +2170,7 @@
               <a:buNone/>
             </a:pPr>
             <a:r>
-              <a:rPr lang="en-US" sz="1200" dirty="0">
+              <a:rPr lang="en-US" sz="1100" dirty="0">
                 <a:solidFill>
                   <a:srgbClr val="1A1A2E"/>
                 </a:solidFill>
@@ -2124,9 +2178,9 @@
                 <a:ea typeface="Calibri" pitchFamily="34" charset="-122"/>
                 <a:cs typeface="Calibri" pitchFamily="34" charset="-120"/>
               </a:rPr>
-              <a:t>3. Comparer avec le résultat ATTENDU</a:t>
-            </a:r>
-            <a:endParaRPr lang="en-US" sz="1200" dirty="0"/>
+              <a:t>4. Statut : OK (conforme) ou KO (bug trouve)</a:t>
+            </a:r>
+            <a:endParaRPr lang="en-US" sz="1100" dirty="0"/>
           </a:p>
         </p:txBody>
       </p:sp>
@@ -2138,8 +2192,8 @@
         </p:nvSpPr>
         <p:spPr>
           <a:xfrm>
-            <a:off x="457200" y="3371850"/>
-            <a:ext cx="8229600" cy="464058"/>
+            <a:off x="457200" y="3383280"/>
+            <a:ext cx="8229600" cy="475488"/>
           </a:xfrm>
           <a:prstGeom prst="rect">
             <a:avLst/>
@@ -2148,13 +2202,6 @@
             <a:srgbClr val="FFF3E0"/>
           </a:solidFill>
           <a:ln/>
-          <a:effectLst>
-            <a:outerShdw sx="100000" sy="100000" kx="0" ky="0" algn="bl" rotWithShape="0" blurRad="50800" dist="25400" dir="8100000">
-              <a:srgbClr val="000000">
-                <a:alpha val="12000"/>
-              </a:srgbClr>
-            </a:outerShdw>
-          </a:effectLst>
         </p:spPr>
       </p:sp>
       <p:sp>
@@ -2165,8 +2212,8 @@
         </p:nvSpPr>
         <p:spPr>
           <a:xfrm>
-            <a:off x="457200" y="3371850"/>
-            <a:ext cx="45720" cy="464058"/>
+            <a:off x="457200" y="3383280"/>
+            <a:ext cx="45720" cy="475488"/>
           </a:xfrm>
           <a:prstGeom prst="rect">
             <a:avLst/>
@@ -2185,8 +2232,8 @@
         </p:nvSpPr>
         <p:spPr>
           <a:xfrm>
-            <a:off x="685800" y="3371850"/>
-            <a:ext cx="7818120" cy="464058"/>
+            <a:off x="640080" y="3383280"/>
+            <a:ext cx="7863840" cy="475488"/>
           </a:xfrm>
           <a:prstGeom prst="rect">
             <a:avLst/>
@@ -2202,7 +2249,7 @@
               <a:buNone/>
             </a:pPr>
             <a:r>
-              <a:rPr lang="en-US" sz="1200" dirty="0">
+              <a:rPr lang="en-US" sz="1100" dirty="0">
                 <a:solidFill>
                   <a:srgbClr val="1A1A2E"/>
                 </a:solidFill>
@@ -2210,9 +2257,9 @@
                 <a:ea typeface="Calibri" pitchFamily="34" charset="-122"/>
                 <a:cs typeface="Calibri" pitchFamily="34" charset="-120"/>
               </a:rPr>
-              <a:t>4. Statut : OK (conforme) ou KO (bug trouvé)</a:t>
-            </a:r>
-            <a:endParaRPr lang="en-US" sz="1200" dirty="0"/>
+              <a:t>Capturer les ecrans des cas KO (preuve)</a:t>
+            </a:r>
+            <a:endParaRPr lang="en-US" sz="1100" dirty="0"/>
           </a:p>
         </p:txBody>
       </p:sp>
@@ -2224,8 +2271,8 @@
         </p:nvSpPr>
         <p:spPr>
           <a:xfrm>
-            <a:off x="457200" y="3863340"/>
-            <a:ext cx="8229600" cy="464058"/>
+            <a:off x="457200" y="3886200"/>
+            <a:ext cx="8229600" cy="475488"/>
           </a:xfrm>
           <a:prstGeom prst="rect">
             <a:avLst/>
@@ -2234,13 +2281,6 @@
             <a:srgbClr val="FFFFFF"/>
           </a:solidFill>
           <a:ln/>
-          <a:effectLst>
-            <a:outerShdw sx="100000" sy="100000" kx="0" ky="0" algn="bl" rotWithShape="0" blurRad="50800" dist="25400" dir="8100000">
-              <a:srgbClr val="000000">
-                <a:alpha val="12000"/>
-              </a:srgbClr>
-            </a:outerShdw>
-          </a:effectLst>
         </p:spPr>
       </p:sp>
       <p:sp>
@@ -2251,8 +2291,8 @@
         </p:nvSpPr>
         <p:spPr>
           <a:xfrm>
-            <a:off x="457200" y="3863340"/>
-            <a:ext cx="45720" cy="464058"/>
+            <a:off x="457200" y="3886200"/>
+            <a:ext cx="45720" cy="475488"/>
           </a:xfrm>
           <a:prstGeom prst="rect">
             <a:avLst/>
@@ -2271,8 +2311,8 @@
         </p:nvSpPr>
         <p:spPr>
           <a:xfrm>
-            <a:off x="685800" y="3863340"/>
-            <a:ext cx="7818120" cy="464058"/>
+            <a:off x="640080" y="3886200"/>
+            <a:ext cx="7863840" cy="475488"/>
           </a:xfrm>
           <a:prstGeom prst="rect">
             <a:avLst/>
@@ -2288,7 +2328,7 @@
               <a:buNone/>
             </a:pPr>
             <a:r>
-              <a:rPr lang="en-US" sz="1200" dirty="0">
+              <a:rPr lang="en-US" sz="1100" dirty="0">
                 <a:solidFill>
                   <a:srgbClr val="1A1A2E"/>
                 </a:solidFill>
@@ -2296,95 +2336,9 @@
                 <a:ea typeface="Calibri" pitchFamily="34" charset="-122"/>
                 <a:cs typeface="Calibri" pitchFamily="34" charset="-120"/>
               </a:rPr>
-              <a:t>Remplir le tableau Excel fourni avec les résultats</a:t>
-            </a:r>
-            <a:endParaRPr lang="en-US" sz="1200" dirty="0"/>
-          </a:p>
-        </p:txBody>
-      </p:sp>
-      <p:sp>
-        <p:nvSpPr>
-          <p:cNvPr id="25" name="Shape 23"/>
-          <p:cNvSpPr/>
-          <p:nvPr/>
-        </p:nvSpPr>
-        <p:spPr>
-          <a:xfrm>
-            <a:off x="457200" y="4354830"/>
-            <a:ext cx="8229600" cy="464058"/>
-          </a:xfrm>
-          <a:prstGeom prst="rect">
-            <a:avLst/>
-          </a:prstGeom>
-          <a:solidFill>
-            <a:srgbClr val="FFF3E0"/>
-          </a:solidFill>
-          <a:ln/>
-          <a:effectLst>
-            <a:outerShdw sx="100000" sy="100000" kx="0" ky="0" algn="bl" rotWithShape="0" blurRad="50800" dist="25400" dir="8100000">
-              <a:srgbClr val="000000">
-                <a:alpha val="12000"/>
-              </a:srgbClr>
-            </a:outerShdw>
-          </a:effectLst>
-        </p:spPr>
-      </p:sp>
-      <p:sp>
-        <p:nvSpPr>
-          <p:cNvPr id="26" name="Shape 24"/>
-          <p:cNvSpPr/>
-          <p:nvPr/>
-        </p:nvSpPr>
-        <p:spPr>
-          <a:xfrm>
-            <a:off x="457200" y="4354830"/>
-            <a:ext cx="45720" cy="464058"/>
-          </a:xfrm>
-          <a:prstGeom prst="rect">
-            <a:avLst/>
-          </a:prstGeom>
-          <a:solidFill>
-            <a:srgbClr val="E65100"/>
-          </a:solidFill>
-          <a:ln/>
-        </p:spPr>
-      </p:sp>
-      <p:sp>
-        <p:nvSpPr>
-          <p:cNvPr id="27" name="Text 25"/>
-          <p:cNvSpPr/>
-          <p:nvPr/>
-        </p:nvSpPr>
-        <p:spPr>
-          <a:xfrm>
-            <a:off x="685800" y="4354830"/>
-            <a:ext cx="7818120" cy="464058"/>
-          </a:xfrm>
-          <a:prstGeom prst="rect">
-            <a:avLst/>
-          </a:prstGeom>
-          <a:noFill/>
-          <a:ln/>
-        </p:spPr>
-        <p:txBody>
-          <a:bodyPr wrap="square" lIns="0" tIns="0" rIns="0" bIns="0" rtlCol="0" anchor="ctr"/>
-          <a:lstStyle/>
-          <a:p>
-            <a:pPr indent="0" marL="0">
-              <a:buNone/>
-            </a:pPr>
-            <a:r>
-              <a:rPr lang="en-US" sz="1200" dirty="0">
-                <a:solidFill>
-                  <a:srgbClr val="1A1A2E"/>
-                </a:solidFill>
-                <a:latin typeface="Calibri" pitchFamily="34" charset="0"/>
-                <a:ea typeface="Calibri" pitchFamily="34" charset="-122"/>
-                <a:cs typeface="Calibri" pitchFamily="34" charset="-120"/>
-              </a:rPr>
-              <a:t>Capturer les écrans des cas KO (preuve)</a:t>
-            </a:r>
-            <a:endParaRPr lang="en-US" sz="1200" dirty="0"/>
+              <a:t>Remplir le tableau Excel fourni</a:t>
+            </a:r>
+            <a:endParaRPr lang="en-US" sz="1100" dirty="0"/>
           </a:p>
         </p:txBody>
       </p:sp>
@@ -2449,7 +2403,7 @@
         <p:spPr>
           <a:xfrm>
             <a:off x="457200" y="182880"/>
-            <a:ext cx="8229600" cy="594360"/>
+            <a:ext cx="8229600" cy="548640"/>
           </a:xfrm>
           <a:prstGeom prst="rect">
             <a:avLst/>
@@ -2465,7 +2419,7 @@
               <a:buNone/>
             </a:pPr>
             <a:r>
-              <a:rPr lang="en-US" sz="2400" b="1" dirty="0">
+              <a:rPr lang="en-US" sz="2200" b="1" dirty="0">
                 <a:solidFill>
                   <a:srgbClr val="BF360C"/>
                 </a:solidFill>
@@ -2473,9 +2427,9 @@
                 <a:ea typeface="Trebuchet MS" pitchFamily="34" charset="-122"/>
                 <a:cs typeface="Trebuchet MS" pitchFamily="34" charset="-120"/>
               </a:rPr>
-              <a:t>Corriger les bugs trouvés</a:t>
-            </a:r>
-            <a:endParaRPr lang="en-US" sz="2400" dirty="0"/>
+              <a:t>Corriger les bugs</a:t>
+            </a:r>
+            <a:endParaRPr lang="en-US" sz="2200" dirty="0"/>
           </a:p>
         </p:txBody>
       </p:sp>
@@ -2487,8 +2441,8 @@
         </p:nvSpPr>
         <p:spPr>
           <a:xfrm>
-            <a:off x="457200" y="914400"/>
-            <a:ext cx="8229600" cy="521208"/>
+            <a:off x="457200" y="868680"/>
+            <a:ext cx="8229600" cy="475488"/>
           </a:xfrm>
           <a:prstGeom prst="rect">
             <a:avLst/>
@@ -2497,13 +2451,6 @@
             <a:srgbClr val="FFFFFF"/>
           </a:solidFill>
           <a:ln/>
-          <a:effectLst>
-            <a:outerShdw sx="100000" sy="100000" kx="0" ky="0" algn="bl" rotWithShape="0" blurRad="50800" dist="25400" dir="8100000">
-              <a:srgbClr val="000000">
-                <a:alpha val="12000"/>
-              </a:srgbClr>
-            </a:outerShdw>
-          </a:effectLst>
         </p:spPr>
       </p:sp>
       <p:sp>
@@ -2514,8 +2461,8 @@
         </p:nvSpPr>
         <p:spPr>
           <a:xfrm>
-            <a:off x="457200" y="914400"/>
-            <a:ext cx="45720" cy="521208"/>
+            <a:off x="457200" y="868680"/>
+            <a:ext cx="45720" cy="475488"/>
           </a:xfrm>
           <a:prstGeom prst="rect">
             <a:avLst/>
@@ -2534,8 +2481,8 @@
         </p:nvSpPr>
         <p:spPr>
           <a:xfrm>
-            <a:off x="685800" y="914400"/>
-            <a:ext cx="7818120" cy="521208"/>
+            <a:off x="640080" y="868680"/>
+            <a:ext cx="7863840" cy="475488"/>
           </a:xfrm>
           <a:prstGeom prst="rect">
             <a:avLst/>
@@ -2551,7 +2498,7 @@
               <a:buNone/>
             </a:pPr>
             <a:r>
-              <a:rPr lang="en-US" sz="1200" dirty="0">
+              <a:rPr lang="en-US" sz="1100" dirty="0">
                 <a:solidFill>
                   <a:srgbClr val="1A1A2E"/>
                 </a:solidFill>
@@ -2559,9 +2506,9 @@
                 <a:ea typeface="Calibri" pitchFamily="34" charset="-122"/>
                 <a:cs typeface="Calibri" pitchFamily="34" charset="-120"/>
               </a:rPr>
-              <a:t>Bug trouvé → documenter : description, cause probable, priorité</a:t>
-            </a:r>
-            <a:endParaRPr lang="en-US" sz="1200" dirty="0"/>
+              <a:t>Bug trouve → documenter : description, cause, priorite</a:t>
+            </a:r>
+            <a:endParaRPr lang="en-US" sz="1100" dirty="0"/>
           </a:p>
         </p:txBody>
       </p:sp>
@@ -2573,8 +2520,8 @@
         </p:nvSpPr>
         <p:spPr>
           <a:xfrm>
-            <a:off x="457200" y="1463040"/>
-            <a:ext cx="8229600" cy="521208"/>
+            <a:off x="457200" y="1371600"/>
+            <a:ext cx="8229600" cy="475488"/>
           </a:xfrm>
           <a:prstGeom prst="rect">
             <a:avLst/>
@@ -2583,13 +2530,6 @@
             <a:srgbClr val="FFF3E0"/>
           </a:solidFill>
           <a:ln/>
-          <a:effectLst>
-            <a:outerShdw sx="100000" sy="100000" kx="0" ky="0" algn="bl" rotWithShape="0" blurRad="50800" dist="25400" dir="8100000">
-              <a:srgbClr val="000000">
-                <a:alpha val="12000"/>
-              </a:srgbClr>
-            </a:outerShdw>
-          </a:effectLst>
         </p:spPr>
       </p:sp>
       <p:sp>
@@ -2600,8 +2540,8 @@
         </p:nvSpPr>
         <p:spPr>
           <a:xfrm>
-            <a:off x="457200" y="1463040"/>
-            <a:ext cx="45720" cy="521208"/>
+            <a:off x="457200" y="1371600"/>
+            <a:ext cx="45720" cy="475488"/>
           </a:xfrm>
           <a:prstGeom prst="rect">
             <a:avLst/>
@@ -2620,8 +2560,8 @@
         </p:nvSpPr>
         <p:spPr>
           <a:xfrm>
-            <a:off x="685800" y="1463040"/>
-            <a:ext cx="7818120" cy="521208"/>
+            <a:off x="640080" y="1371600"/>
+            <a:ext cx="7863840" cy="475488"/>
           </a:xfrm>
           <a:prstGeom prst="rect">
             <a:avLst/>
@@ -2637,7 +2577,7 @@
               <a:buNone/>
             </a:pPr>
             <a:r>
-              <a:rPr lang="en-US" sz="1200" dirty="0">
+              <a:rPr lang="en-US" sz="1100" dirty="0">
                 <a:solidFill>
                   <a:srgbClr val="1A1A2E"/>
                 </a:solidFill>
@@ -2645,9 +2585,9 @@
                 <a:ea typeface="Calibri" pitchFamily="34" charset="-122"/>
                 <a:cs typeface="Calibri" pitchFamily="34" charset="-120"/>
               </a:rPr>
-              <a:t>Corriger : ALTER TABLE, UPDATE, GRANT, CREATE/ALTER PROCEDURE...</a:t>
-            </a:r>
-            <a:endParaRPr lang="en-US" sz="1200" dirty="0"/>
+              <a:t>Corriger : ALTER TABLE, UPDATE, GRANT, PROCEDURE...</a:t>
+            </a:r>
+            <a:endParaRPr lang="en-US" sz="1100" dirty="0"/>
           </a:p>
         </p:txBody>
       </p:sp>
@@ -2659,8 +2599,8 @@
         </p:nvSpPr>
         <p:spPr>
           <a:xfrm>
-            <a:off x="457200" y="2011680"/>
-            <a:ext cx="8229600" cy="521208"/>
+            <a:off x="457200" y="1874520"/>
+            <a:ext cx="8229600" cy="475488"/>
           </a:xfrm>
           <a:prstGeom prst="rect">
             <a:avLst/>
@@ -2669,13 +2609,6 @@
             <a:srgbClr val="FFFFFF"/>
           </a:solidFill>
           <a:ln/>
-          <a:effectLst>
-            <a:outerShdw sx="100000" sy="100000" kx="0" ky="0" algn="bl" rotWithShape="0" blurRad="50800" dist="25400" dir="8100000">
-              <a:srgbClr val="000000">
-                <a:alpha val="12000"/>
-              </a:srgbClr>
-            </a:outerShdw>
-          </a:effectLst>
         </p:spPr>
       </p:sp>
       <p:sp>
@@ -2686,8 +2619,8 @@
         </p:nvSpPr>
         <p:spPr>
           <a:xfrm>
-            <a:off x="457200" y="2011680"/>
-            <a:ext cx="45720" cy="521208"/>
+            <a:off x="457200" y="1874520"/>
+            <a:ext cx="45720" cy="475488"/>
           </a:xfrm>
           <a:prstGeom prst="rect">
             <a:avLst/>
@@ -2706,8 +2639,8 @@
         </p:nvSpPr>
         <p:spPr>
           <a:xfrm>
-            <a:off x="685800" y="2011680"/>
-            <a:ext cx="7818120" cy="521208"/>
+            <a:off x="640080" y="1874520"/>
+            <a:ext cx="7863840" cy="475488"/>
           </a:xfrm>
           <a:prstGeom prst="rect">
             <a:avLst/>
@@ -2723,7 +2656,7 @@
               <a:buNone/>
             </a:pPr>
             <a:r>
-              <a:rPr lang="en-US" sz="1200" dirty="0">
+              <a:rPr lang="en-US" sz="1100" dirty="0">
                 <a:solidFill>
                   <a:srgbClr val="1A1A2E"/>
                 </a:solidFill>
@@ -2731,9 +2664,9 @@
                 <a:ea typeface="Calibri" pitchFamily="34" charset="-122"/>
                 <a:cs typeface="Calibri" pitchFamily="34" charset="-120"/>
               </a:rPr>
-              <a:t>RE-TESTER le cas après correction → doit passer en OK</a:t>
-            </a:r>
-            <a:endParaRPr lang="en-US" sz="1200" dirty="0"/>
+              <a:t>RE-TESTER le cas apres correction → doit passer en OK</a:t>
+            </a:r>
+            <a:endParaRPr lang="en-US" sz="1100" dirty="0"/>
           </a:p>
         </p:txBody>
       </p:sp>
@@ -2745,8 +2678,8 @@
         </p:nvSpPr>
         <p:spPr>
           <a:xfrm>
-            <a:off x="457200" y="2560320"/>
-            <a:ext cx="8229600" cy="521208"/>
+            <a:off x="457200" y="2377440"/>
+            <a:ext cx="8229600" cy="475488"/>
           </a:xfrm>
           <a:prstGeom prst="rect">
             <a:avLst/>
@@ -2755,13 +2688,6 @@
             <a:srgbClr val="FFF3E0"/>
           </a:solidFill>
           <a:ln/>
-          <a:effectLst>
-            <a:outerShdw sx="100000" sy="100000" kx="0" ky="0" algn="bl" rotWithShape="0" blurRad="50800" dist="25400" dir="8100000">
-              <a:srgbClr val="000000">
-                <a:alpha val="12000"/>
-              </a:srgbClr>
-            </a:outerShdw>
-          </a:effectLst>
         </p:spPr>
       </p:sp>
       <p:sp>
@@ -2772,8 +2698,8 @@
         </p:nvSpPr>
         <p:spPr>
           <a:xfrm>
-            <a:off x="457200" y="2560320"/>
-            <a:ext cx="45720" cy="521208"/>
+            <a:off x="457200" y="2377440"/>
+            <a:ext cx="45720" cy="475488"/>
           </a:xfrm>
           <a:prstGeom prst="rect">
             <a:avLst/>
@@ -2792,8 +2718,8 @@
         </p:nvSpPr>
         <p:spPr>
           <a:xfrm>
-            <a:off x="685800" y="2560320"/>
-            <a:ext cx="7818120" cy="521208"/>
+            <a:off x="640080" y="2377440"/>
+            <a:ext cx="7863840" cy="475488"/>
           </a:xfrm>
           <a:prstGeom prst="rect">
             <a:avLst/>
@@ -2809,7 +2735,7 @@
               <a:buNone/>
             </a:pPr>
             <a:r>
-              <a:rPr lang="en-US" sz="1200" dirty="0">
+              <a:rPr lang="en-US" sz="1100" dirty="0">
                 <a:solidFill>
                   <a:srgbClr val="1A1A2E"/>
                 </a:solidFill>
@@ -2817,9 +2743,9 @@
                 <a:ea typeface="Calibri" pitchFamily="34" charset="-122"/>
                 <a:cs typeface="Calibri" pitchFamily="34" charset="-120"/>
               </a:rPr>
-              <a:t>Test de régression : les AUTRES tests marchent encore ?</a:t>
-            </a:r>
-            <a:endParaRPr lang="en-US" sz="1200" dirty="0"/>
+              <a:t>Test de REGRESSION : les AUTRES tests marchent encore ?</a:t>
+            </a:r>
+            <a:endParaRPr lang="en-US" sz="1100" dirty="0"/>
           </a:p>
         </p:txBody>
       </p:sp>
@@ -2831,8 +2757,8 @@
         </p:nvSpPr>
         <p:spPr>
           <a:xfrm>
-            <a:off x="457200" y="3108960"/>
-            <a:ext cx="8229600" cy="521208"/>
+            <a:off x="457200" y="2880360"/>
+            <a:ext cx="8229600" cy="475488"/>
           </a:xfrm>
           <a:prstGeom prst="rect">
             <a:avLst/>
@@ -2841,13 +2767,6 @@
             <a:srgbClr val="FFFFFF"/>
           </a:solidFill>
           <a:ln/>
-          <a:effectLst>
-            <a:outerShdw sx="100000" sy="100000" kx="0" ky="0" algn="bl" rotWithShape="0" blurRad="50800" dist="25400" dir="8100000">
-              <a:srgbClr val="000000">
-                <a:alpha val="12000"/>
-              </a:srgbClr>
-            </a:outerShdw>
-          </a:effectLst>
         </p:spPr>
       </p:sp>
       <p:sp>
@@ -2858,8 +2777,8 @@
         </p:nvSpPr>
         <p:spPr>
           <a:xfrm>
-            <a:off x="457200" y="3108960"/>
-            <a:ext cx="45720" cy="521208"/>
+            <a:off x="457200" y="2880360"/>
+            <a:ext cx="45720" cy="475488"/>
           </a:xfrm>
           <a:prstGeom prst="rect">
             <a:avLst/>
@@ -2878,8 +2797,8 @@
         </p:nvSpPr>
         <p:spPr>
           <a:xfrm>
-            <a:off x="685800" y="3108960"/>
-            <a:ext cx="7818120" cy="521208"/>
+            <a:off x="640080" y="2880360"/>
+            <a:ext cx="7863840" cy="475488"/>
           </a:xfrm>
           <a:prstGeom prst="rect">
             <a:avLst/>
@@ -2895,7 +2814,7 @@
               <a:buNone/>
             </a:pPr>
             <a:r>
-              <a:rPr lang="en-US" sz="1200" dirty="0">
+              <a:rPr lang="en-US" sz="1100" dirty="0">
                 <a:solidFill>
                   <a:srgbClr val="1A1A2E"/>
                 </a:solidFill>
@@ -2903,9 +2822,9 @@
                 <a:ea typeface="Calibri" pitchFamily="34" charset="-122"/>
                 <a:cs typeface="Calibri" pitchFamily="34" charset="-120"/>
               </a:rPr>
-              <a:t>Cycle : tester → trouver bug → corriger → re-tester → valider</a:t>
-            </a:r>
-            <a:endParaRPr lang="en-US" sz="1200" dirty="0"/>
+              <a:t>Cycle : tester → corriger → RE-TESTER → valider</a:t>
+            </a:r>
+            <a:endParaRPr lang="en-US" sz="1100" dirty="0"/>
           </a:p>
         </p:txBody>
       </p:sp>
@@ -2917,8 +2836,8 @@
         </p:nvSpPr>
         <p:spPr>
           <a:xfrm>
-            <a:off x="457200" y="3657600"/>
-            <a:ext cx="8229600" cy="521208"/>
+            <a:off x="457200" y="3383280"/>
+            <a:ext cx="8229600" cy="475488"/>
           </a:xfrm>
           <a:prstGeom prst="rect">
             <a:avLst/>
@@ -2927,13 +2846,6 @@
             <a:srgbClr val="FFF3E0"/>
           </a:solidFill>
           <a:ln/>
-          <a:effectLst>
-            <a:outerShdw sx="100000" sy="100000" kx="0" ky="0" algn="bl" rotWithShape="0" blurRad="50800" dist="25400" dir="8100000">
-              <a:srgbClr val="000000">
-                <a:alpha val="12000"/>
-              </a:srgbClr>
-            </a:outerShdw>
-          </a:effectLst>
         </p:spPr>
       </p:sp>
       <p:sp>
@@ -2944,8 +2856,8 @@
         </p:nvSpPr>
         <p:spPr>
           <a:xfrm>
-            <a:off x="457200" y="3657600"/>
-            <a:ext cx="45720" cy="521208"/>
+            <a:off x="457200" y="3383280"/>
+            <a:ext cx="45720" cy="475488"/>
           </a:xfrm>
           <a:prstGeom prst="rect">
             <a:avLst/>
@@ -2964,8 +2876,8 @@
         </p:nvSpPr>
         <p:spPr>
           <a:xfrm>
-            <a:off x="685800" y="3657600"/>
-            <a:ext cx="7818120" cy="521208"/>
+            <a:off x="640080" y="3383280"/>
+            <a:ext cx="7863840" cy="475488"/>
           </a:xfrm>
           <a:prstGeom prst="rect">
             <a:avLst/>
@@ -2981,7 +2893,86 @@
               <a:buNone/>
             </a:pPr>
             <a:r>
-              <a:rPr lang="en-US" sz="1200" dirty="0">
+              <a:rPr lang="en-US" sz="1100" dirty="0">
+                <a:solidFill>
+                  <a:srgbClr val="1A1A2E"/>
+                </a:solidFill>
+                <a:latin typeface="Calibri" pitchFamily="34" charset="0"/>
+                <a:ea typeface="Calibri" pitchFamily="34" charset="-122"/>
+                <a:cs typeface="Calibri" pitchFamily="34" charset="-120"/>
+              </a:rPr>
+              <a:t>Un bug corrige peut en creer un autre !</a:t>
+            </a:r>
+            <a:endParaRPr lang="en-US" sz="1100" dirty="0"/>
+          </a:p>
+        </p:txBody>
+      </p:sp>
+      <p:sp>
+        <p:nvSpPr>
+          <p:cNvPr id="22" name="Shape 20"/>
+          <p:cNvSpPr/>
+          <p:nvPr/>
+        </p:nvSpPr>
+        <p:spPr>
+          <a:xfrm>
+            <a:off x="457200" y="3886200"/>
+            <a:ext cx="8229600" cy="475488"/>
+          </a:xfrm>
+          <a:prstGeom prst="rect">
+            <a:avLst/>
+          </a:prstGeom>
+          <a:solidFill>
+            <a:srgbClr val="FFFFFF"/>
+          </a:solidFill>
+          <a:ln/>
+        </p:spPr>
+      </p:sp>
+      <p:sp>
+        <p:nvSpPr>
+          <p:cNvPr id="23" name="Shape 21"/>
+          <p:cNvSpPr/>
+          <p:nvPr/>
+        </p:nvSpPr>
+        <p:spPr>
+          <a:xfrm>
+            <a:off x="457200" y="3886200"/>
+            <a:ext cx="45720" cy="475488"/>
+          </a:xfrm>
+          <a:prstGeom prst="rect">
+            <a:avLst/>
+          </a:prstGeom>
+          <a:solidFill>
+            <a:srgbClr val="E65100"/>
+          </a:solidFill>
+          <a:ln/>
+        </p:spPr>
+      </p:sp>
+      <p:sp>
+        <p:nvSpPr>
+          <p:cNvPr id="24" name="Text 22"/>
+          <p:cNvSpPr/>
+          <p:nvPr/>
+        </p:nvSpPr>
+        <p:spPr>
+          <a:xfrm>
+            <a:off x="640080" y="3886200"/>
+            <a:ext cx="7863840" cy="475488"/>
+          </a:xfrm>
+          <a:prstGeom prst="rect">
+            <a:avLst/>
+          </a:prstGeom>
+          <a:noFill/>
+          <a:ln/>
+        </p:spPr>
+        <p:txBody>
+          <a:bodyPr wrap="square" lIns="0" tIns="0" rIns="0" bIns="0" rtlCol="0" anchor="ctr"/>
+          <a:lstStyle/>
+          <a:p>
+            <a:pPr indent="0" marL="0">
+              <a:buNone/>
+            </a:pPr>
+            <a:r>
+              <a:rPr lang="en-US" sz="1100" dirty="0">
                 <a:solidFill>
                   <a:srgbClr val="1A1A2E"/>
                 </a:solidFill>
@@ -2991,7 +2982,7 @@
               </a:rPr>
               <a:t>Documenter la correction dans le rapport de test</a:t>
             </a:r>
-            <a:endParaRPr lang="en-US" sz="1200" dirty="0"/>
+            <a:endParaRPr lang="en-US" sz="1100" dirty="0"/>
           </a:p>
         </p:txBody>
       </p:sp>
@@ -3056,7 +3047,7 @@
         <p:spPr>
           <a:xfrm>
             <a:off x="457200" y="182880"/>
-            <a:ext cx="8229600" cy="594360"/>
+            <a:ext cx="8229600" cy="548640"/>
           </a:xfrm>
           <a:prstGeom prst="rect">
             <a:avLst/>
@@ -3072,7 +3063,7 @@
               <a:buNone/>
             </a:pPr>
             <a:r>
-              <a:rPr lang="en-US" sz="2400" b="1" dirty="0">
+              <a:rPr lang="en-US" sz="2200" b="1" dirty="0">
                 <a:solidFill>
                   <a:srgbClr val="BF360C"/>
                 </a:solidFill>
@@ -3080,9 +3071,9 @@
                 <a:ea typeface="Trebuchet MS" pitchFamily="34" charset="-122"/>
                 <a:cs typeface="Trebuchet MS" pitchFamily="34" charset="-120"/>
               </a:rPr>
-              <a:t>Évaluer l'efficacité des tests (M4)</a:t>
-            </a:r>
-            <a:endParaRPr lang="en-US" sz="2400" dirty="0"/>
+              <a:t>Evaluer l'efficacite des tests (M4)</a:t>
+            </a:r>
+            <a:endParaRPr lang="en-US" sz="2200" dirty="0"/>
           </a:p>
         </p:txBody>
       </p:sp>
@@ -3094,8 +3085,8 @@
         </p:nvSpPr>
         <p:spPr>
           <a:xfrm>
-            <a:off x="457200" y="914400"/>
-            <a:ext cx="8229600" cy="521208"/>
+            <a:off x="457200" y="868680"/>
+            <a:ext cx="8229600" cy="475488"/>
           </a:xfrm>
           <a:prstGeom prst="rect">
             <a:avLst/>
@@ -3104,13 +3095,6 @@
             <a:srgbClr val="FFFFFF"/>
           </a:solidFill>
           <a:ln/>
-          <a:effectLst>
-            <a:outerShdw sx="100000" sy="100000" kx="0" ky="0" algn="bl" rotWithShape="0" blurRad="50800" dist="25400" dir="8100000">
-              <a:srgbClr val="000000">
-                <a:alpha val="12000"/>
-              </a:srgbClr>
-            </a:outerShdw>
-          </a:effectLst>
         </p:spPr>
       </p:sp>
       <p:sp>
@@ -3121,8 +3105,8 @@
         </p:nvSpPr>
         <p:spPr>
           <a:xfrm>
-            <a:off x="457200" y="914400"/>
-            <a:ext cx="45720" cy="521208"/>
+            <a:off x="457200" y="868680"/>
+            <a:ext cx="45720" cy="475488"/>
           </a:xfrm>
           <a:prstGeom prst="rect">
             <a:avLst/>
@@ -3141,8 +3125,8 @@
         </p:nvSpPr>
         <p:spPr>
           <a:xfrm>
-            <a:off x="685800" y="914400"/>
-            <a:ext cx="7818120" cy="521208"/>
+            <a:off x="640080" y="868680"/>
+            <a:ext cx="7863840" cy="475488"/>
           </a:xfrm>
           <a:prstGeom prst="rect">
             <a:avLst/>
@@ -3158,7 +3142,7 @@
               <a:buNone/>
             </a:pPr>
             <a:r>
-              <a:rPr lang="en-US" sz="1200" dirty="0">
+              <a:rPr lang="en-US" sz="1100" dirty="0">
                 <a:solidFill>
                   <a:srgbClr val="1A1A2E"/>
                 </a:solidFill>
@@ -3166,9 +3150,9 @@
                 <a:ea typeface="Calibri" pitchFamily="34" charset="-122"/>
                 <a:cs typeface="Calibri" pitchFamily="34" charset="-120"/>
               </a:rPr>
-              <a:t>Taux de couverture : nb cas testés / nb fonctionnalités totales</a:t>
-            </a:r>
-            <a:endParaRPr lang="en-US" sz="1200" dirty="0"/>
+              <a:t>Taux de couverture : nb cas testes / nb fonctionnalites totales</a:t>
+            </a:r>
+            <a:endParaRPr lang="en-US" sz="1100" dirty="0"/>
           </a:p>
         </p:txBody>
       </p:sp>
@@ -3180,8 +3164,8 @@
         </p:nvSpPr>
         <p:spPr>
           <a:xfrm>
-            <a:off x="457200" y="1463040"/>
-            <a:ext cx="8229600" cy="521208"/>
+            <a:off x="457200" y="1371600"/>
+            <a:ext cx="8229600" cy="475488"/>
           </a:xfrm>
           <a:prstGeom prst="rect">
             <a:avLst/>
@@ -3190,13 +3174,6 @@
             <a:srgbClr val="FFF3E0"/>
           </a:solidFill>
           <a:ln/>
-          <a:effectLst>
-            <a:outerShdw sx="100000" sy="100000" kx="0" ky="0" algn="bl" rotWithShape="0" blurRad="50800" dist="25400" dir="8100000">
-              <a:srgbClr val="000000">
-                <a:alpha val="12000"/>
-              </a:srgbClr>
-            </a:outerShdw>
-          </a:effectLst>
         </p:spPr>
       </p:sp>
       <p:sp>
@@ -3207,8 +3184,8 @@
         </p:nvSpPr>
         <p:spPr>
           <a:xfrm>
-            <a:off x="457200" y="1463040"/>
-            <a:ext cx="45720" cy="521208"/>
+            <a:off x="457200" y="1371600"/>
+            <a:ext cx="45720" cy="475488"/>
           </a:xfrm>
           <a:prstGeom prst="rect">
             <a:avLst/>
@@ -3227,8 +3204,8 @@
         </p:nvSpPr>
         <p:spPr>
           <a:xfrm>
-            <a:off x="685800" y="1463040"/>
-            <a:ext cx="7818120" cy="521208"/>
+            <a:off x="640080" y="1371600"/>
+            <a:ext cx="7863840" cy="475488"/>
           </a:xfrm>
           <a:prstGeom prst="rect">
             <a:avLst/>
@@ -3244,7 +3221,7 @@
               <a:buNone/>
             </a:pPr>
             <a:r>
-              <a:rPr lang="en-US" sz="1200" dirty="0">
+              <a:rPr lang="en-US" sz="1100" dirty="0">
                 <a:solidFill>
                   <a:srgbClr val="1A1A2E"/>
                 </a:solidFill>
@@ -3252,9 +3229,9 @@
                 <a:ea typeface="Calibri" pitchFamily="34" charset="-122"/>
                 <a:cs typeface="Calibri" pitchFamily="34" charset="-120"/>
               </a:rPr>
-              <a:t>Pertinence des données : normales + limites + erronées pour chaque cas ?</a:t>
-            </a:r>
-            <a:endParaRPr lang="en-US" sz="1200" dirty="0"/>
+              <a:t>Pertinence des donnees : normales + limites + erronees pour chaque ?</a:t>
+            </a:r>
+            <a:endParaRPr lang="en-US" sz="1100" dirty="0"/>
           </a:p>
         </p:txBody>
       </p:sp>
@@ -3266,8 +3243,8 @@
         </p:nvSpPr>
         <p:spPr>
           <a:xfrm>
-            <a:off x="457200" y="2011680"/>
-            <a:ext cx="8229600" cy="521208"/>
+            <a:off x="457200" y="1874520"/>
+            <a:ext cx="8229600" cy="475488"/>
           </a:xfrm>
           <a:prstGeom prst="rect">
             <a:avLst/>
@@ -3276,13 +3253,6 @@
             <a:srgbClr val="FFFFFF"/>
           </a:solidFill>
           <a:ln/>
-          <a:effectLst>
-            <a:outerShdw sx="100000" sy="100000" kx="0" ky="0" algn="bl" rotWithShape="0" blurRad="50800" dist="25400" dir="8100000">
-              <a:srgbClr val="000000">
-                <a:alpha val="12000"/>
-              </a:srgbClr>
-            </a:outerShdw>
-          </a:effectLst>
         </p:spPr>
       </p:sp>
       <p:sp>
@@ -3293,8 +3263,8 @@
         </p:nvSpPr>
         <p:spPr>
           <a:xfrm>
-            <a:off x="457200" y="2011680"/>
-            <a:ext cx="45720" cy="521208"/>
+            <a:off x="457200" y="1874520"/>
+            <a:ext cx="45720" cy="475488"/>
           </a:xfrm>
           <a:prstGeom prst="rect">
             <a:avLst/>
@@ -3313,8 +3283,8 @@
         </p:nvSpPr>
         <p:spPr>
           <a:xfrm>
-            <a:off x="685800" y="2011680"/>
-            <a:ext cx="7818120" cy="521208"/>
+            <a:off x="640080" y="1874520"/>
+            <a:ext cx="7863840" cy="475488"/>
           </a:xfrm>
           <a:prstGeom prst="rect">
             <a:avLst/>
@@ -3330,7 +3300,7 @@
               <a:buNone/>
             </a:pPr>
             <a:r>
-              <a:rPr lang="en-US" sz="1200" dirty="0">
+              <a:rPr lang="en-US" sz="1100" dirty="0">
                 <a:solidFill>
                   <a:srgbClr val="1A1A2E"/>
                 </a:solidFill>
@@ -3338,9 +3308,9 @@
                 <a:ea typeface="Calibri" pitchFamily="34" charset="-122"/>
                 <a:cs typeface="Calibri" pitchFamily="34" charset="-120"/>
               </a:rPr>
-              <a:t>Bugs trouvés : combien ? Quelle gravité ? Tous corrigés ?</a:t>
-            </a:r>
-            <a:endParaRPr lang="en-US" sz="1200" dirty="0"/>
+              <a:t>Bugs trouves : combien ? Gravite ? Tous corriges ?</a:t>
+            </a:r>
+            <a:endParaRPr lang="en-US" sz="1100" dirty="0"/>
           </a:p>
         </p:txBody>
       </p:sp>
@@ -3352,8 +3322,8 @@
         </p:nvSpPr>
         <p:spPr>
           <a:xfrm>
-            <a:off x="457200" y="2560320"/>
-            <a:ext cx="8229600" cy="521208"/>
+            <a:off x="457200" y="2377440"/>
+            <a:ext cx="8229600" cy="475488"/>
           </a:xfrm>
           <a:prstGeom prst="rect">
             <a:avLst/>
@@ -3362,13 +3332,6 @@
             <a:srgbClr val="FFF3E0"/>
           </a:solidFill>
           <a:ln/>
-          <a:effectLst>
-            <a:outerShdw sx="100000" sy="100000" kx="0" ky="0" algn="bl" rotWithShape="0" blurRad="50800" dist="25400" dir="8100000">
-              <a:srgbClr val="000000">
-                <a:alpha val="12000"/>
-              </a:srgbClr>
-            </a:outerShdw>
-          </a:effectLst>
         </p:spPr>
       </p:sp>
       <p:sp>
@@ -3379,8 +3342,8 @@
         </p:nvSpPr>
         <p:spPr>
           <a:xfrm>
-            <a:off x="457200" y="2560320"/>
-            <a:ext cx="45720" cy="521208"/>
+            <a:off x="457200" y="2377440"/>
+            <a:ext cx="45720" cy="475488"/>
           </a:xfrm>
           <a:prstGeom prst="rect">
             <a:avLst/>
@@ -3399,8 +3362,8 @@
         </p:nvSpPr>
         <p:spPr>
           <a:xfrm>
-            <a:off x="685800" y="2560320"/>
-            <a:ext cx="7818120" cy="521208"/>
+            <a:off x="640080" y="2377440"/>
+            <a:ext cx="7863840" cy="475488"/>
           </a:xfrm>
           <a:prstGeom prst="rect">
             <a:avLst/>
@@ -3416,7 +3379,7 @@
               <a:buNone/>
             </a:pPr>
             <a:r>
-              <a:rPr lang="en-US" sz="1200" dirty="0">
+              <a:rPr lang="en-US" sz="1100" dirty="0">
                 <a:solidFill>
                   <a:srgbClr val="1A1A2E"/>
                 </a:solidFill>
@@ -3424,9 +3387,9 @@
                 <a:ea typeface="Calibri" pitchFamily="34" charset="-122"/>
                 <a:cs typeface="Calibri" pitchFamily="34" charset="-120"/>
               </a:rPr>
-              <a:t>Analyse : les tests étaient-ils suffisants ?</a:t>
-            </a:r>
-            <a:endParaRPr lang="en-US" sz="1200" dirty="0"/>
+              <a:t>Analyse : les tests etaient-ils suffisants ?</a:t>
+            </a:r>
+            <a:endParaRPr lang="en-US" sz="1100" dirty="0"/>
           </a:p>
         </p:txBody>
       </p:sp>
@@ -3438,8 +3401,8 @@
         </p:nvSpPr>
         <p:spPr>
           <a:xfrm>
-            <a:off x="457200" y="3108960"/>
-            <a:ext cx="8229600" cy="521208"/>
+            <a:off x="457200" y="2880360"/>
+            <a:ext cx="8229600" cy="475488"/>
           </a:xfrm>
           <a:prstGeom prst="rect">
             <a:avLst/>
@@ -3448,13 +3411,6 @@
             <a:srgbClr val="FFFFFF"/>
           </a:solidFill>
           <a:ln/>
-          <a:effectLst>
-            <a:outerShdw sx="100000" sy="100000" kx="0" ky="0" algn="bl" rotWithShape="0" blurRad="50800" dist="25400" dir="8100000">
-              <a:srgbClr val="000000">
-                <a:alpha val="12000"/>
-              </a:srgbClr>
-            </a:outerShdw>
-          </a:effectLst>
         </p:spPr>
       </p:sp>
       <p:sp>
@@ -3465,8 +3421,8 @@
         </p:nvSpPr>
         <p:spPr>
           <a:xfrm>
-            <a:off x="457200" y="3108960"/>
-            <a:ext cx="45720" cy="521208"/>
+            <a:off x="457200" y="2880360"/>
+            <a:ext cx="45720" cy="475488"/>
           </a:xfrm>
           <a:prstGeom prst="rect">
             <a:avLst/>
@@ -3485,8 +3441,8 @@
         </p:nvSpPr>
         <p:spPr>
           <a:xfrm>
-            <a:off x="685800" y="3108960"/>
-            <a:ext cx="7818120" cy="521208"/>
+            <a:off x="640080" y="2880360"/>
+            <a:ext cx="7863840" cy="475488"/>
           </a:xfrm>
           <a:prstGeom prst="rect">
             <a:avLst/>
@@ -3502,7 +3458,7 @@
               <a:buNone/>
             </a:pPr>
             <a:r>
-              <a:rPr lang="en-US" sz="1200" dirty="0">
+              <a:rPr lang="en-US" sz="1100" dirty="0">
                 <a:solidFill>
                   <a:srgbClr val="1A1A2E"/>
                 </a:solidFill>
@@ -3510,9 +3466,9 @@
                 <a:ea typeface="Calibri" pitchFamily="34" charset="-122"/>
                 <a:cs typeface="Calibri" pitchFamily="34" charset="-120"/>
               </a:rPr>
-              <a:t>Recommandations : tests supplémentaires à ajouter</a:t>
-            </a:r>
-            <a:endParaRPr lang="en-US" sz="1200" dirty="0"/>
+              <a:t>Recommandations : tests supplementaires a ajouter</a:t>
+            </a:r>
+            <a:endParaRPr lang="en-US" sz="1100" dirty="0"/>
           </a:p>
         </p:txBody>
       </p:sp>
@@ -3524,8 +3480,8 @@
         </p:nvSpPr>
         <p:spPr>
           <a:xfrm>
-            <a:off x="457200" y="3657600"/>
-            <a:ext cx="8229600" cy="521208"/>
+            <a:off x="457200" y="3383280"/>
+            <a:ext cx="8229600" cy="475488"/>
           </a:xfrm>
           <a:prstGeom prst="rect">
             <a:avLst/>
@@ -3534,13 +3490,6 @@
             <a:srgbClr val="FFF3E0"/>
           </a:solidFill>
           <a:ln/>
-          <a:effectLst>
-            <a:outerShdw sx="100000" sy="100000" kx="0" ky="0" algn="bl" rotWithShape="0" blurRad="50800" dist="25400" dir="8100000">
-              <a:srgbClr val="000000">
-                <a:alpha val="12000"/>
-              </a:srgbClr>
-            </a:outerShdw>
-          </a:effectLst>
         </p:spPr>
       </p:sp>
       <p:sp>
@@ -3551,8 +3500,8 @@
         </p:nvSpPr>
         <p:spPr>
           <a:xfrm>
-            <a:off x="457200" y="3657600"/>
-            <a:ext cx="45720" cy="521208"/>
+            <a:off x="457200" y="3383280"/>
+            <a:ext cx="45720" cy="475488"/>
           </a:xfrm>
           <a:prstGeom prst="rect">
             <a:avLst/>
@@ -3571,8 +3520,8 @@
         </p:nvSpPr>
         <p:spPr>
           <a:xfrm>
-            <a:off x="685800" y="3657600"/>
-            <a:ext cx="7818120" cy="521208"/>
+            <a:off x="640080" y="3383280"/>
+            <a:ext cx="7863840" cy="475488"/>
           </a:xfrm>
           <a:prstGeom prst="rect">
             <a:avLst/>
@@ -3588,7 +3537,7 @@
               <a:buNone/>
             </a:pPr>
             <a:r>
-              <a:rPr lang="en-US" sz="1200" dirty="0">
+              <a:rPr lang="en-US" sz="1100" dirty="0">
                 <a:solidFill>
                   <a:srgbClr val="1A1A2E"/>
                 </a:solidFill>
@@ -3596,9 +3545,9 @@
                 <a:ea typeface="Calibri" pitchFamily="34" charset="-122"/>
                 <a:cs typeface="Calibri" pitchFamily="34" charset="-120"/>
               </a:rPr>
-              <a:t>M4 demande de JUSTIFIER le choix des données de test</a:t>
-            </a:r>
-            <a:endParaRPr lang="en-US" sz="1200" dirty="0"/>
+              <a:t>M4 demande de JUSTIFIER le choix des donnees de test</a:t>
+            </a:r>
+            <a:endParaRPr lang="en-US" sz="1100" dirty="0"/>
           </a:p>
         </p:txBody>
       </p:sp>
@@ -3610,8 +3559,8 @@
         </p:nvSpPr>
         <p:spPr>
           <a:xfrm>
-            <a:off x="457200" y="4206240"/>
-            <a:ext cx="8229600" cy="521208"/>
+            <a:off x="457200" y="3886200"/>
+            <a:ext cx="8229600" cy="475488"/>
           </a:xfrm>
           <a:prstGeom prst="rect">
             <a:avLst/>
@@ -3620,13 +3569,6 @@
             <a:srgbClr val="FFFFFF"/>
           </a:solidFill>
           <a:ln/>
-          <a:effectLst>
-            <a:outerShdw sx="100000" sy="100000" kx="0" ky="0" algn="bl" rotWithShape="0" blurRad="50800" dist="25400" dir="8100000">
-              <a:srgbClr val="000000">
-                <a:alpha val="12000"/>
-              </a:srgbClr>
-            </a:outerShdw>
-          </a:effectLst>
         </p:spPr>
       </p:sp>
       <p:sp>
@@ -3637,8 +3579,8 @@
         </p:nvSpPr>
         <p:spPr>
           <a:xfrm>
-            <a:off x="457200" y="4206240"/>
-            <a:ext cx="45720" cy="521208"/>
+            <a:off x="457200" y="3886200"/>
+            <a:ext cx="45720" cy="475488"/>
           </a:xfrm>
           <a:prstGeom prst="rect">
             <a:avLst/>
@@ -3657,8 +3599,8 @@
         </p:nvSpPr>
         <p:spPr>
           <a:xfrm>
-            <a:off x="685800" y="4206240"/>
-            <a:ext cx="7818120" cy="521208"/>
+            <a:off x="640080" y="3886200"/>
+            <a:ext cx="7863840" cy="475488"/>
           </a:xfrm>
           <a:prstGeom prst="rect">
             <a:avLst/>
@@ -3674,7 +3616,7 @@
               <a:buNone/>
             </a:pPr>
             <a:r>
-              <a:rPr lang="en-US" sz="1200" dirty="0">
+              <a:rPr lang="en-US" sz="1100" dirty="0">
                 <a:solidFill>
                   <a:srgbClr val="1A1A2E"/>
                 </a:solidFill>
@@ -3682,9 +3624,9 @@
                 <a:ea typeface="Calibri" pitchFamily="34" charset="-122"/>
                 <a:cs typeface="Calibri" pitchFamily="34" charset="-120"/>
               </a:rPr>
-              <a:t>Rédiger 1-2 paragraphes d'analyse argumentée</a:t>
-            </a:r>
-            <a:endParaRPr lang="en-US" sz="1200" dirty="0"/>
+              <a:t>Rediger 1-2 paragraphes d'analyse argumentee</a:t>
+            </a:r>
+            <a:endParaRPr lang="en-US" sz="1100" dirty="0"/>
           </a:p>
         </p:txBody>
       </p:sp>
@@ -3749,7 +3691,7 @@
         <p:spPr>
           <a:xfrm>
             <a:off x="457200" y="182880"/>
-            <a:ext cx="8229600" cy="594360"/>
+            <a:ext cx="8229600" cy="548640"/>
           </a:xfrm>
           <a:prstGeom prst="rect">
             <a:avLst/>
@@ -3765,7 +3707,7 @@
               <a:buNone/>
             </a:pPr>
             <a:r>
-              <a:rPr lang="en-US" sz="2400" b="1" dirty="0">
+              <a:rPr lang="en-US" sz="2200" b="1" dirty="0">
                 <a:solidFill>
                   <a:srgbClr val="BF360C"/>
                 </a:solidFill>
@@ -3773,9 +3715,9 @@
                 <a:ea typeface="Trebuchet MS" pitchFamily="34" charset="-122"/>
                 <a:cs typeface="Trebuchet MS" pitchFamily="34" charset="-120"/>
               </a:rPr>
-              <a:t>Exercice Module 18</a:t>
-            </a:r>
-            <a:endParaRPr lang="en-US" sz="2400" dirty="0"/>
+              <a:t>Checklist fin de LO3</a:t>
+            </a:r>
+            <a:endParaRPr lang="en-US" sz="2200" dirty="0"/>
           </a:p>
         </p:txBody>
       </p:sp>
@@ -3787,8 +3729,8 @@
         </p:nvSpPr>
         <p:spPr>
           <a:xfrm>
-            <a:off x="457200" y="914400"/>
-            <a:ext cx="8229600" cy="521208"/>
+            <a:off x="457200" y="868680"/>
+            <a:ext cx="8229600" cy="464058"/>
           </a:xfrm>
           <a:prstGeom prst="rect">
             <a:avLst/>
@@ -3797,13 +3739,6 @@
             <a:srgbClr val="FFFFFF"/>
           </a:solidFill>
           <a:ln/>
-          <a:effectLst>
-            <a:outerShdw sx="100000" sy="100000" kx="0" ky="0" algn="bl" rotWithShape="0" blurRad="50800" dist="25400" dir="8100000">
-              <a:srgbClr val="000000">
-                <a:alpha val="12000"/>
-              </a:srgbClr>
-            </a:outerShdw>
-          </a:effectLst>
         </p:spPr>
       </p:sp>
       <p:sp>
@@ -3814,8 +3749,8 @@
         </p:nvSpPr>
         <p:spPr>
           <a:xfrm>
-            <a:off x="457200" y="914400"/>
-            <a:ext cx="45720" cy="521208"/>
+            <a:off x="457200" y="868680"/>
+            <a:ext cx="45720" cy="464058"/>
           </a:xfrm>
           <a:prstGeom prst="rect">
             <a:avLst/>
@@ -3834,8 +3769,8 @@
         </p:nvSpPr>
         <p:spPr>
           <a:xfrm>
-            <a:off x="685800" y="914400"/>
-            <a:ext cx="7818120" cy="521208"/>
+            <a:off x="640080" y="868680"/>
+            <a:ext cx="7863840" cy="464058"/>
           </a:xfrm>
           <a:prstGeom prst="rect">
             <a:avLst/>
@@ -3851,7 +3786,7 @@
               <a:buNone/>
             </a:pPr>
             <a:r>
-              <a:rPr lang="en-US" sz="1200" dirty="0">
+              <a:rPr lang="en-US" sz="1100" dirty="0">
                 <a:solidFill>
                   <a:srgbClr val="1A1A2E"/>
                 </a:solidFill>
@@ -3859,9 +3794,9 @@
                 <a:ea typeface="Calibri" pitchFamily="34" charset="-122"/>
                 <a:cs typeface="Calibri" pitchFamily="34" charset="-120"/>
               </a:rPr>
-              <a:t>Exécuter les 20 cas de test du plan (Module 17)</a:t>
-            </a:r>
-            <a:endParaRPr lang="en-US" sz="1200" dirty="0"/>
+              <a:t>Plan de test avec 20+ cas (Module 17) → fait</a:t>
+            </a:r>
+            <a:endParaRPr lang="en-US" sz="1100" dirty="0"/>
           </a:p>
         </p:txBody>
       </p:sp>
@@ -3873,8 +3808,8 @@
         </p:nvSpPr>
         <p:spPr>
           <a:xfrm>
-            <a:off x="457200" y="1463040"/>
-            <a:ext cx="8229600" cy="521208"/>
+            <a:off x="457200" y="1360170"/>
+            <a:ext cx="8229600" cy="464058"/>
           </a:xfrm>
           <a:prstGeom prst="rect">
             <a:avLst/>
@@ -3883,13 +3818,6 @@
             <a:srgbClr val="FFF3E0"/>
           </a:solidFill>
           <a:ln/>
-          <a:effectLst>
-            <a:outerShdw sx="100000" sy="100000" kx="0" ky="0" algn="bl" rotWithShape="0" blurRad="50800" dist="25400" dir="8100000">
-              <a:srgbClr val="000000">
-                <a:alpha val="12000"/>
-              </a:srgbClr>
-            </a:outerShdw>
-          </a:effectLst>
         </p:spPr>
       </p:sp>
       <p:sp>
@@ -3900,8 +3828,8 @@
         </p:nvSpPr>
         <p:spPr>
           <a:xfrm>
-            <a:off x="457200" y="1463040"/>
-            <a:ext cx="45720" cy="521208"/>
+            <a:off x="457200" y="1360170"/>
+            <a:ext cx="45720" cy="464058"/>
           </a:xfrm>
           <a:prstGeom prst="rect">
             <a:avLst/>
@@ -3920,8 +3848,8 @@
         </p:nvSpPr>
         <p:spPr>
           <a:xfrm>
-            <a:off x="685800" y="1463040"/>
-            <a:ext cx="7818120" cy="521208"/>
+            <a:off x="640080" y="1360170"/>
+            <a:ext cx="7863840" cy="464058"/>
           </a:xfrm>
           <a:prstGeom prst="rect">
             <a:avLst/>
@@ -3937,7 +3865,7 @@
               <a:buNone/>
             </a:pPr>
             <a:r>
-              <a:rPr lang="en-US" sz="1200" dirty="0">
+              <a:rPr lang="en-US" sz="1100" dirty="0">
                 <a:solidFill>
                   <a:srgbClr val="1A1A2E"/>
                 </a:solidFill>
@@ -3945,9 +3873,9 @@
                 <a:ea typeface="Calibri" pitchFamily="34" charset="-122"/>
                 <a:cs typeface="Calibri" pitchFamily="34" charset="-120"/>
               </a:rPr>
-              <a:t>Remplir le tableau Excel (résultat obtenu + statut)</a:t>
-            </a:r>
-            <a:endParaRPr lang="en-US" sz="1200" dirty="0"/>
+              <a:t>Execution documentee (tableau Excel rempli) → fait</a:t>
+            </a:r>
+            <a:endParaRPr lang="en-US" sz="1100" dirty="0"/>
           </a:p>
         </p:txBody>
       </p:sp>
@@ -3959,8 +3887,8 @@
         </p:nvSpPr>
         <p:spPr>
           <a:xfrm>
-            <a:off x="457200" y="2011680"/>
-            <a:ext cx="8229600" cy="521208"/>
+            <a:off x="457200" y="1851660"/>
+            <a:ext cx="8229600" cy="464058"/>
           </a:xfrm>
           <a:prstGeom prst="rect">
             <a:avLst/>
@@ -3969,13 +3897,6 @@
             <a:srgbClr val="FFFFFF"/>
           </a:solidFill>
           <a:ln/>
-          <a:effectLst>
-            <a:outerShdw sx="100000" sy="100000" kx="0" ky="0" algn="bl" rotWithShape="0" blurRad="50800" dist="25400" dir="8100000">
-              <a:srgbClr val="000000">
-                <a:alpha val="12000"/>
-              </a:srgbClr>
-            </a:outerShdw>
-          </a:effectLst>
         </p:spPr>
       </p:sp>
       <p:sp>
@@ -3986,8 +3907,8 @@
         </p:nvSpPr>
         <p:spPr>
           <a:xfrm>
-            <a:off x="457200" y="2011680"/>
-            <a:ext cx="45720" cy="521208"/>
+            <a:off x="457200" y="1851660"/>
+            <a:ext cx="45720" cy="464058"/>
           </a:xfrm>
           <a:prstGeom prst="rect">
             <a:avLst/>
@@ -4006,8 +3927,8 @@
         </p:nvSpPr>
         <p:spPr>
           <a:xfrm>
-            <a:off x="685800" y="2011680"/>
-            <a:ext cx="7818120" cy="521208"/>
+            <a:off x="640080" y="1851660"/>
+            <a:ext cx="7863840" cy="464058"/>
           </a:xfrm>
           <a:prstGeom prst="rect">
             <a:avLst/>
@@ -4023,7 +3944,7 @@
               <a:buNone/>
             </a:pPr>
             <a:r>
-              <a:rPr lang="en-US" sz="1200" dirty="0">
+              <a:rPr lang="en-US" sz="1100" dirty="0">
                 <a:solidFill>
                   <a:srgbClr val="1A1A2E"/>
                 </a:solidFill>
@@ -4031,9 +3952,9 @@
                 <a:ea typeface="Calibri" pitchFamily="34" charset="-122"/>
                 <a:cs typeface="Calibri" pitchFamily="34" charset="-120"/>
               </a:rPr>
-              <a:t>Identifier au moins 3 bugs et les corriger</a:t>
-            </a:r>
-            <a:endParaRPr lang="en-US" sz="1200" dirty="0"/>
+              <a:t>Bugs identifies, corriges et re-testes → fait</a:t>
+            </a:r>
+            <a:endParaRPr lang="en-US" sz="1100" dirty="0"/>
           </a:p>
         </p:txBody>
       </p:sp>
@@ -4045,8 +3966,8 @@
         </p:nvSpPr>
         <p:spPr>
           <a:xfrm>
-            <a:off x="457200" y="2560320"/>
-            <a:ext cx="8229600" cy="521208"/>
+            <a:off x="457200" y="2343150"/>
+            <a:ext cx="8229600" cy="464058"/>
           </a:xfrm>
           <a:prstGeom prst="rect">
             <a:avLst/>
@@ -4055,13 +3976,6 @@
             <a:srgbClr val="FFF3E0"/>
           </a:solidFill>
           <a:ln/>
-          <a:effectLst>
-            <a:outerShdw sx="100000" sy="100000" kx="0" ky="0" algn="bl" rotWithShape="0" blurRad="50800" dist="25400" dir="8100000">
-              <a:srgbClr val="000000">
-                <a:alpha val="12000"/>
-              </a:srgbClr>
-            </a:outerShdw>
-          </a:effectLst>
         </p:spPr>
       </p:sp>
       <p:sp>
@@ -4072,8 +3986,8 @@
         </p:nvSpPr>
         <p:spPr>
           <a:xfrm>
-            <a:off x="457200" y="2560320"/>
-            <a:ext cx="45720" cy="521208"/>
+            <a:off x="457200" y="2343150"/>
+            <a:ext cx="45720" cy="464058"/>
           </a:xfrm>
           <a:prstGeom prst="rect">
             <a:avLst/>
@@ -4092,8 +4006,8 @@
         </p:nvSpPr>
         <p:spPr>
           <a:xfrm>
-            <a:off x="685800" y="2560320"/>
-            <a:ext cx="7818120" cy="521208"/>
+            <a:off x="640080" y="2343150"/>
+            <a:ext cx="7863840" cy="464058"/>
           </a:xfrm>
           <a:prstGeom prst="rect">
             <a:avLst/>
@@ -4109,7 +4023,7 @@
               <a:buNone/>
             </a:pPr>
             <a:r>
-              <a:rPr lang="en-US" sz="1200" dirty="0">
+              <a:rPr lang="en-US" sz="1100" dirty="0">
                 <a:solidFill>
                   <a:srgbClr val="1A1A2E"/>
                 </a:solidFill>
@@ -4117,9 +4031,9 @@
                 <a:ea typeface="Calibri" pitchFamily="34" charset="-122"/>
                 <a:cs typeface="Calibri" pitchFamily="34" charset="-120"/>
               </a:rPr>
-              <a:t>Re-tester après correction</a:t>
-            </a:r>
-            <a:endParaRPr lang="en-US" sz="1200" dirty="0"/>
+              <a:t>Tests de regression passes → fait</a:t>
+            </a:r>
+            <a:endParaRPr lang="en-US" sz="1100" dirty="0"/>
           </a:p>
         </p:txBody>
       </p:sp>
@@ -4131,8 +4045,8 @@
         </p:nvSpPr>
         <p:spPr>
           <a:xfrm>
-            <a:off x="457200" y="3108960"/>
-            <a:ext cx="8229600" cy="521208"/>
+            <a:off x="457200" y="2834640"/>
+            <a:ext cx="8229600" cy="464058"/>
           </a:xfrm>
           <a:prstGeom prst="rect">
             <a:avLst/>
@@ -4141,13 +4055,6 @@
             <a:srgbClr val="FFFFFF"/>
           </a:solidFill>
           <a:ln/>
-          <a:effectLst>
-            <a:outerShdw sx="100000" sy="100000" kx="0" ky="0" algn="bl" rotWithShape="0" blurRad="50800" dist="25400" dir="8100000">
-              <a:srgbClr val="000000">
-                <a:alpha val="12000"/>
-              </a:srgbClr>
-            </a:outerShdw>
-          </a:effectLst>
         </p:spPr>
       </p:sp>
       <p:sp>
@@ -4158,8 +4065,8 @@
         </p:nvSpPr>
         <p:spPr>
           <a:xfrm>
-            <a:off x="457200" y="3108960"/>
-            <a:ext cx="45720" cy="521208"/>
+            <a:off x="457200" y="2834640"/>
+            <a:ext cx="45720" cy="464058"/>
           </a:xfrm>
           <a:prstGeom prst="rect">
             <a:avLst/>
@@ -4178,8 +4085,8 @@
         </p:nvSpPr>
         <p:spPr>
           <a:xfrm>
-            <a:off x="685800" y="3108960"/>
-            <a:ext cx="7818120" cy="521208"/>
+            <a:off x="640080" y="2834640"/>
+            <a:ext cx="7863840" cy="464058"/>
           </a:xfrm>
           <a:prstGeom prst="rect">
             <a:avLst/>
@@ -4195,7 +4102,7 @@
               <a:buNone/>
             </a:pPr>
             <a:r>
-              <a:rPr lang="en-US" sz="1200" dirty="0">
+              <a:rPr lang="en-US" sz="1100" dirty="0">
                 <a:solidFill>
                   <a:srgbClr val="1A1A2E"/>
                 </a:solidFill>
@@ -4203,9 +4110,9 @@
                 <a:ea typeface="Calibri" pitchFamily="34" charset="-122"/>
                 <a:cs typeface="Calibri" pitchFamily="34" charset="-120"/>
               </a:rPr>
-              <a:t>Calculer le taux de couverture final</a:t>
-            </a:r>
-            <a:endParaRPr lang="en-US" sz="1200" dirty="0"/>
+              <a:t>Matrice de tracabilite complete → fait</a:t>
+            </a:r>
+            <a:endParaRPr lang="en-US" sz="1100" dirty="0"/>
           </a:p>
         </p:txBody>
       </p:sp>
@@ -4217,8 +4124,8 @@
         </p:nvSpPr>
         <p:spPr>
           <a:xfrm>
-            <a:off x="457200" y="3657600"/>
-            <a:ext cx="8229600" cy="521208"/>
+            <a:off x="457200" y="3326130"/>
+            <a:ext cx="8229600" cy="464058"/>
           </a:xfrm>
           <a:prstGeom prst="rect">
             <a:avLst/>
@@ -4227,13 +4134,6 @@
             <a:srgbClr val="FFF3E0"/>
           </a:solidFill>
           <a:ln/>
-          <a:effectLst>
-            <a:outerShdw sx="100000" sy="100000" kx="0" ky="0" algn="bl" rotWithShape="0" blurRad="50800" dist="25400" dir="8100000">
-              <a:srgbClr val="000000">
-                <a:alpha val="12000"/>
-              </a:srgbClr>
-            </a:outerShdw>
-          </a:effectLst>
         </p:spPr>
       </p:sp>
       <p:sp>
@@ -4244,8 +4144,8 @@
         </p:nvSpPr>
         <p:spPr>
           <a:xfrm>
-            <a:off x="457200" y="3657600"/>
-            <a:ext cx="45720" cy="521208"/>
+            <a:off x="457200" y="3326130"/>
+            <a:ext cx="45720" cy="464058"/>
           </a:xfrm>
           <a:prstGeom prst="rect">
             <a:avLst/>
@@ -4264,8 +4164,8 @@
         </p:nvSpPr>
         <p:spPr>
           <a:xfrm>
-            <a:off x="685800" y="3657600"/>
-            <a:ext cx="7818120" cy="521208"/>
+            <a:off x="640080" y="3326130"/>
+            <a:ext cx="7863840" cy="464058"/>
           </a:xfrm>
           <a:prstGeom prst="rect">
             <a:avLst/>
@@ -4281,7 +4181,7 @@
               <a:buNone/>
             </a:pPr>
             <a:r>
-              <a:rPr lang="en-US" sz="1200" dirty="0">
+              <a:rPr lang="en-US" sz="1100" dirty="0">
                 <a:solidFill>
                   <a:srgbClr val="1A1A2E"/>
                 </a:solidFill>
@@ -4289,9 +4189,9 @@
                 <a:ea typeface="Calibri" pitchFamily="34" charset="-122"/>
                 <a:cs typeface="Calibri" pitchFamily="34" charset="-120"/>
               </a:rPr>
-              <a:t>Rédiger le paragraphe d'évaluation M4 (efficacité + justification données)</a:t>
-            </a:r>
-            <a:endParaRPr lang="en-US" sz="1200" dirty="0"/>
+              <a:t>Taux de couverture calcule → fait</a:t>
+            </a:r>
+            <a:endParaRPr lang="en-US" sz="1100" dirty="0"/>
           </a:p>
         </p:txBody>
       </p:sp>
@@ -4303,8 +4203,8 @@
         </p:nvSpPr>
         <p:spPr>
           <a:xfrm>
-            <a:off x="457200" y="4206240"/>
-            <a:ext cx="8229600" cy="521208"/>
+            <a:off x="457200" y="3817620"/>
+            <a:ext cx="8229600" cy="464058"/>
           </a:xfrm>
           <a:prstGeom prst="rect">
             <a:avLst/>
@@ -4313,13 +4213,6 @@
             <a:srgbClr val="FFFFFF"/>
           </a:solidFill>
           <a:ln/>
-          <a:effectLst>
-            <a:outerShdw sx="100000" sy="100000" kx="0" ky="0" algn="bl" rotWithShape="0" blurRad="50800" dist="25400" dir="8100000">
-              <a:srgbClr val="000000">
-                <a:alpha val="12000"/>
-              </a:srgbClr>
-            </a:outerShdw>
-          </a:effectLst>
         </p:spPr>
       </p:sp>
       <p:sp>
@@ -4330,8 +4223,8 @@
         </p:nvSpPr>
         <p:spPr>
           <a:xfrm>
-            <a:off x="457200" y="4206240"/>
-            <a:ext cx="45720" cy="521208"/>
+            <a:off x="457200" y="3817620"/>
+            <a:ext cx="45720" cy="464058"/>
           </a:xfrm>
           <a:prstGeom prst="rect">
             <a:avLst/>
@@ -4350,8 +4243,8 @@
         </p:nvSpPr>
         <p:spPr>
           <a:xfrm>
-            <a:off x="685800" y="4206240"/>
-            <a:ext cx="7818120" cy="521208"/>
+            <a:off x="640080" y="3817620"/>
+            <a:ext cx="7863840" cy="464058"/>
           </a:xfrm>
           <a:prstGeom prst="rect">
             <a:avLst/>
@@ -4367,7 +4260,7 @@
               <a:buNone/>
             </a:pPr>
             <a:r>
-              <a:rPr lang="en-US" sz="1200" dirty="0">
+              <a:rPr lang="en-US" sz="1100" dirty="0">
                 <a:solidFill>
                   <a:srgbClr val="1A1A2E"/>
                 </a:solidFill>
@@ -4375,9 +4268,88 @@
                 <a:ea typeface="Calibri" pitchFamily="34" charset="-122"/>
                 <a:cs typeface="Calibri" pitchFamily="34" charset="-120"/>
               </a:rPr>
-              <a:t>DÉFI : ajouter 5 tests de cas limites extrêmes non prévus</a:t>
-            </a:r>
-            <a:endParaRPr lang="en-US" sz="1200" dirty="0"/>
+              <a:t>Evaluation M4 redigee (1-2 paragraphes) → fait</a:t>
+            </a:r>
+            <a:endParaRPr lang="en-US" sz="1100" dirty="0"/>
+          </a:p>
+        </p:txBody>
+      </p:sp>
+      <p:sp>
+        <p:nvSpPr>
+          <p:cNvPr id="25" name="Shape 23"/>
+          <p:cNvSpPr/>
+          <p:nvPr/>
+        </p:nvSpPr>
+        <p:spPr>
+          <a:xfrm>
+            <a:off x="457200" y="4309110"/>
+            <a:ext cx="8229600" cy="464058"/>
+          </a:xfrm>
+          <a:prstGeom prst="rect">
+            <a:avLst/>
+          </a:prstGeom>
+          <a:solidFill>
+            <a:srgbClr val="FFF3E0"/>
+          </a:solidFill>
+          <a:ln/>
+        </p:spPr>
+      </p:sp>
+      <p:sp>
+        <p:nvSpPr>
+          <p:cNvPr id="26" name="Shape 24"/>
+          <p:cNvSpPr/>
+          <p:nvPr/>
+        </p:nvSpPr>
+        <p:spPr>
+          <a:xfrm>
+            <a:off x="457200" y="4309110"/>
+            <a:ext cx="45720" cy="464058"/>
+          </a:xfrm>
+          <a:prstGeom prst="rect">
+            <a:avLst/>
+          </a:prstGeom>
+          <a:solidFill>
+            <a:srgbClr val="E65100"/>
+          </a:solidFill>
+          <a:ln/>
+        </p:spPr>
+      </p:sp>
+      <p:sp>
+        <p:nvSpPr>
+          <p:cNvPr id="27" name="Text 25"/>
+          <p:cNvSpPr/>
+          <p:nvPr/>
+        </p:nvSpPr>
+        <p:spPr>
+          <a:xfrm>
+            <a:off x="640080" y="4309110"/>
+            <a:ext cx="7863840" cy="464058"/>
+          </a:xfrm>
+          <a:prstGeom prst="rect">
+            <a:avLst/>
+          </a:prstGeom>
+          <a:noFill/>
+          <a:ln/>
+        </p:spPr>
+        <p:txBody>
+          <a:bodyPr wrap="square" lIns="0" tIns="0" rIns="0" bIns="0" rtlCol="0" anchor="ctr"/>
+          <a:lstStyle/>
+          <a:p>
+            <a:pPr indent="0" marL="0">
+              <a:buNone/>
+            </a:pPr>
+            <a:r>
+              <a:rPr lang="en-US" sz="1100" dirty="0">
+                <a:solidFill>
+                  <a:srgbClr val="1A1A2E"/>
+                </a:solidFill>
+                <a:latin typeface="Calibri" pitchFamily="34" charset="0"/>
+                <a:ea typeface="Calibri" pitchFamily="34" charset="-122"/>
+                <a:cs typeface="Calibri" pitchFamily="34" charset="-120"/>
+              </a:rPr>
+              <a:t>Captures d'ecran des cas KO → fait</a:t>
+            </a:r>
+            <a:endParaRPr lang="en-US" sz="1100" dirty="0"/>
           </a:p>
         </p:txBody>
       </p:sp>
@@ -4392,6 +4364,650 @@
 <file path=ppt/slides/slide6.xml><?xml version="1.0" encoding="utf-8"?>
 <p:sld xmlns:a="http://schemas.openxmlformats.org/drawingml/2006/main" xmlns:r="http://schemas.openxmlformats.org/officeDocument/2006/relationships" xmlns:p="http://schemas.openxmlformats.org/presentationml/2006/main">
   <p:cSld name="Slide 6">
+    <p:bg>
+      <p:bgPr>
+        <a:solidFill>
+          <a:srgbClr val="F5F7FA"/>
+        </a:solidFill>
+      </p:bgPr>
+    </p:bg>
+    <p:spTree>
+      <p:nvGrpSpPr>
+        <p:cNvPr id="1" name=""/>
+        <p:cNvGrpSpPr/>
+        <p:nvPr/>
+      </p:nvGrpSpPr>
+      <p:grpSpPr>
+        <a:xfrm>
+          <a:off x="0" y="0"/>
+          <a:ext cx="0" cy="0"/>
+          <a:chOff x="0" y="0"/>
+          <a:chExt cx="0" cy="0"/>
+        </a:xfrm>
+      </p:grpSpPr>
+      <p:sp>
+        <p:nvSpPr>
+          <p:cNvPr id="2" name="Shape 0"/>
+          <p:cNvSpPr/>
+          <p:nvPr/>
+        </p:nvSpPr>
+        <p:spPr>
+          <a:xfrm>
+            <a:off x="0" y="0"/>
+            <a:ext cx="9144000" cy="54864"/>
+          </a:xfrm>
+          <a:prstGeom prst="rect">
+            <a:avLst/>
+          </a:prstGeom>
+          <a:solidFill>
+            <a:srgbClr val="E65100"/>
+          </a:solidFill>
+          <a:ln/>
+        </p:spPr>
+      </p:sp>
+      <p:sp>
+        <p:nvSpPr>
+          <p:cNvPr id="3" name="Text 1"/>
+          <p:cNvSpPr/>
+          <p:nvPr/>
+        </p:nvSpPr>
+        <p:spPr>
+          <a:xfrm>
+            <a:off x="457200" y="182880"/>
+            <a:ext cx="8229600" cy="548640"/>
+          </a:xfrm>
+          <a:prstGeom prst="rect">
+            <a:avLst/>
+          </a:prstGeom>
+          <a:noFill/>
+          <a:ln/>
+        </p:spPr>
+        <p:txBody>
+          <a:bodyPr wrap="square" lIns="0" tIns="0" rIns="0" bIns="0" rtlCol="0" anchor="ctr"/>
+          <a:lstStyle/>
+          <a:p>
+            <a:pPr indent="0" marL="0">
+              <a:buNone/>
+            </a:pPr>
+            <a:r>
+              <a:rPr lang="en-US" sz="2200" b="1" dirty="0">
+                <a:solidFill>
+                  <a:srgbClr val="BF360C"/>
+                </a:solidFill>
+                <a:latin typeface="Trebuchet MS" pitchFamily="34" charset="0"/>
+                <a:ea typeface="Trebuchet MS" pitchFamily="34" charset="-122"/>
+                <a:cs typeface="Trebuchet MS" pitchFamily="34" charset="-120"/>
+              </a:rPr>
+              <a:t>Exercice Module 18</a:t>
+            </a:r>
+            <a:endParaRPr lang="en-US" sz="2200" dirty="0"/>
+          </a:p>
+        </p:txBody>
+      </p:sp>
+      <p:sp>
+        <p:nvSpPr>
+          <p:cNvPr id="4" name="Shape 2"/>
+          <p:cNvSpPr/>
+          <p:nvPr/>
+        </p:nvSpPr>
+        <p:spPr>
+          <a:xfrm>
+            <a:off x="457200" y="868680"/>
+            <a:ext cx="8229600" cy="475488"/>
+          </a:xfrm>
+          <a:prstGeom prst="rect">
+            <a:avLst/>
+          </a:prstGeom>
+          <a:solidFill>
+            <a:srgbClr val="FFFFFF"/>
+          </a:solidFill>
+          <a:ln/>
+        </p:spPr>
+      </p:sp>
+      <p:sp>
+        <p:nvSpPr>
+          <p:cNvPr id="5" name="Shape 3"/>
+          <p:cNvSpPr/>
+          <p:nvPr/>
+        </p:nvSpPr>
+        <p:spPr>
+          <a:xfrm>
+            <a:off x="457200" y="868680"/>
+            <a:ext cx="45720" cy="475488"/>
+          </a:xfrm>
+          <a:prstGeom prst="rect">
+            <a:avLst/>
+          </a:prstGeom>
+          <a:solidFill>
+            <a:srgbClr val="E65100"/>
+          </a:solidFill>
+          <a:ln/>
+        </p:spPr>
+      </p:sp>
+      <p:sp>
+        <p:nvSpPr>
+          <p:cNvPr id="6" name="Text 4"/>
+          <p:cNvSpPr/>
+          <p:nvPr/>
+        </p:nvSpPr>
+        <p:spPr>
+          <a:xfrm>
+            <a:off x="640080" y="868680"/>
+            <a:ext cx="7863840" cy="475488"/>
+          </a:xfrm>
+          <a:prstGeom prst="rect">
+            <a:avLst/>
+          </a:prstGeom>
+          <a:noFill/>
+          <a:ln/>
+        </p:spPr>
+        <p:txBody>
+          <a:bodyPr wrap="square" lIns="0" tIns="0" rIns="0" bIns="0" rtlCol="0" anchor="ctr"/>
+          <a:lstStyle/>
+          <a:p>
+            <a:pPr indent="0" marL="0">
+              <a:buNone/>
+            </a:pPr>
+            <a:r>
+              <a:rPr lang="en-US" sz="1100" dirty="0">
+                <a:solidFill>
+                  <a:srgbClr val="1A1A2E"/>
+                </a:solidFill>
+                <a:latin typeface="Calibri" pitchFamily="34" charset="0"/>
+                <a:ea typeface="Calibri" pitchFamily="34" charset="-122"/>
+                <a:cs typeface="Calibri" pitchFamily="34" charset="-120"/>
+              </a:rPr>
+              <a:t>1. Executer les 20 cas du plan sur SwissSound dans HeidiSQL</a:t>
+            </a:r>
+            <a:endParaRPr lang="en-US" sz="1100" dirty="0"/>
+          </a:p>
+        </p:txBody>
+      </p:sp>
+      <p:sp>
+        <p:nvSpPr>
+          <p:cNvPr id="7" name="Shape 5"/>
+          <p:cNvSpPr/>
+          <p:nvPr/>
+        </p:nvSpPr>
+        <p:spPr>
+          <a:xfrm>
+            <a:off x="457200" y="1371600"/>
+            <a:ext cx="8229600" cy="475488"/>
+          </a:xfrm>
+          <a:prstGeom prst="rect">
+            <a:avLst/>
+          </a:prstGeom>
+          <a:solidFill>
+            <a:srgbClr val="FFF3E0"/>
+          </a:solidFill>
+          <a:ln/>
+        </p:spPr>
+      </p:sp>
+      <p:sp>
+        <p:nvSpPr>
+          <p:cNvPr id="8" name="Shape 6"/>
+          <p:cNvSpPr/>
+          <p:nvPr/>
+        </p:nvSpPr>
+        <p:spPr>
+          <a:xfrm>
+            <a:off x="457200" y="1371600"/>
+            <a:ext cx="45720" cy="475488"/>
+          </a:xfrm>
+          <a:prstGeom prst="rect">
+            <a:avLst/>
+          </a:prstGeom>
+          <a:solidFill>
+            <a:srgbClr val="E65100"/>
+          </a:solidFill>
+          <a:ln/>
+        </p:spPr>
+      </p:sp>
+      <p:sp>
+        <p:nvSpPr>
+          <p:cNvPr id="9" name="Text 7"/>
+          <p:cNvSpPr/>
+          <p:nvPr/>
+        </p:nvSpPr>
+        <p:spPr>
+          <a:xfrm>
+            <a:off x="640080" y="1371600"/>
+            <a:ext cx="7863840" cy="475488"/>
+          </a:xfrm>
+          <a:prstGeom prst="rect">
+            <a:avLst/>
+          </a:prstGeom>
+          <a:noFill/>
+          <a:ln/>
+        </p:spPr>
+        <p:txBody>
+          <a:bodyPr wrap="square" lIns="0" tIns="0" rIns="0" bIns="0" rtlCol="0" anchor="ctr"/>
+          <a:lstStyle/>
+          <a:p>
+            <a:pPr indent="0" marL="0">
+              <a:buNone/>
+            </a:pPr>
+            <a:r>
+              <a:rPr lang="en-US" sz="1100" dirty="0">
+                <a:solidFill>
+                  <a:srgbClr val="1A1A2E"/>
+                </a:solidFill>
+                <a:latin typeface="Calibri" pitchFamily="34" charset="0"/>
+                <a:ea typeface="Calibri" pitchFamily="34" charset="-122"/>
+                <a:cs typeface="Calibri" pitchFamily="34" charset="-120"/>
+              </a:rPr>
+              <a:t>2. Remplir le tableau Excel (resultat obtenu + statut OK/KO)</a:t>
+            </a:r>
+            <a:endParaRPr lang="en-US" sz="1100" dirty="0"/>
+          </a:p>
+        </p:txBody>
+      </p:sp>
+      <p:sp>
+        <p:nvSpPr>
+          <p:cNvPr id="10" name="Shape 8"/>
+          <p:cNvSpPr/>
+          <p:nvPr/>
+        </p:nvSpPr>
+        <p:spPr>
+          <a:xfrm>
+            <a:off x="457200" y="1874520"/>
+            <a:ext cx="8229600" cy="475488"/>
+          </a:xfrm>
+          <a:prstGeom prst="rect">
+            <a:avLst/>
+          </a:prstGeom>
+          <a:solidFill>
+            <a:srgbClr val="FFFFFF"/>
+          </a:solidFill>
+          <a:ln/>
+        </p:spPr>
+      </p:sp>
+      <p:sp>
+        <p:nvSpPr>
+          <p:cNvPr id="11" name="Shape 9"/>
+          <p:cNvSpPr/>
+          <p:nvPr/>
+        </p:nvSpPr>
+        <p:spPr>
+          <a:xfrm>
+            <a:off x="457200" y="1874520"/>
+            <a:ext cx="45720" cy="475488"/>
+          </a:xfrm>
+          <a:prstGeom prst="rect">
+            <a:avLst/>
+          </a:prstGeom>
+          <a:solidFill>
+            <a:srgbClr val="E65100"/>
+          </a:solidFill>
+          <a:ln/>
+        </p:spPr>
+      </p:sp>
+      <p:sp>
+        <p:nvSpPr>
+          <p:cNvPr id="12" name="Text 10"/>
+          <p:cNvSpPr/>
+          <p:nvPr/>
+        </p:nvSpPr>
+        <p:spPr>
+          <a:xfrm>
+            <a:off x="640080" y="1874520"/>
+            <a:ext cx="7863840" cy="475488"/>
+          </a:xfrm>
+          <a:prstGeom prst="rect">
+            <a:avLst/>
+          </a:prstGeom>
+          <a:noFill/>
+          <a:ln/>
+        </p:spPr>
+        <p:txBody>
+          <a:bodyPr wrap="square" lIns="0" tIns="0" rIns="0" bIns="0" rtlCol="0" anchor="ctr"/>
+          <a:lstStyle/>
+          <a:p>
+            <a:pPr indent="0" marL="0">
+              <a:buNone/>
+            </a:pPr>
+            <a:r>
+              <a:rPr lang="en-US" sz="1100" dirty="0">
+                <a:solidFill>
+                  <a:srgbClr val="1A1A2E"/>
+                </a:solidFill>
+                <a:latin typeface="Calibri" pitchFamily="34" charset="0"/>
+                <a:ea typeface="Calibri" pitchFamily="34" charset="-122"/>
+                <a:cs typeface="Calibri" pitchFamily="34" charset="-120"/>
+              </a:rPr>
+              <a:t>3. Identifier au moins 3 bugs et les corriger</a:t>
+            </a:r>
+            <a:endParaRPr lang="en-US" sz="1100" dirty="0"/>
+          </a:p>
+        </p:txBody>
+      </p:sp>
+      <p:sp>
+        <p:nvSpPr>
+          <p:cNvPr id="13" name="Shape 11"/>
+          <p:cNvSpPr/>
+          <p:nvPr/>
+        </p:nvSpPr>
+        <p:spPr>
+          <a:xfrm>
+            <a:off x="457200" y="2377440"/>
+            <a:ext cx="8229600" cy="475488"/>
+          </a:xfrm>
+          <a:prstGeom prst="rect">
+            <a:avLst/>
+          </a:prstGeom>
+          <a:solidFill>
+            <a:srgbClr val="FFF3E0"/>
+          </a:solidFill>
+          <a:ln/>
+        </p:spPr>
+      </p:sp>
+      <p:sp>
+        <p:nvSpPr>
+          <p:cNvPr id="14" name="Shape 12"/>
+          <p:cNvSpPr/>
+          <p:nvPr/>
+        </p:nvSpPr>
+        <p:spPr>
+          <a:xfrm>
+            <a:off x="457200" y="2377440"/>
+            <a:ext cx="45720" cy="475488"/>
+          </a:xfrm>
+          <a:prstGeom prst="rect">
+            <a:avLst/>
+          </a:prstGeom>
+          <a:solidFill>
+            <a:srgbClr val="E65100"/>
+          </a:solidFill>
+          <a:ln/>
+        </p:spPr>
+      </p:sp>
+      <p:sp>
+        <p:nvSpPr>
+          <p:cNvPr id="15" name="Text 13"/>
+          <p:cNvSpPr/>
+          <p:nvPr/>
+        </p:nvSpPr>
+        <p:spPr>
+          <a:xfrm>
+            <a:off x="640080" y="2377440"/>
+            <a:ext cx="7863840" cy="475488"/>
+          </a:xfrm>
+          <a:prstGeom prst="rect">
+            <a:avLst/>
+          </a:prstGeom>
+          <a:noFill/>
+          <a:ln/>
+        </p:spPr>
+        <p:txBody>
+          <a:bodyPr wrap="square" lIns="0" tIns="0" rIns="0" bIns="0" rtlCol="0" anchor="ctr"/>
+          <a:lstStyle/>
+          <a:p>
+            <a:pPr indent="0" marL="0">
+              <a:buNone/>
+            </a:pPr>
+            <a:r>
+              <a:rPr lang="en-US" sz="1100" dirty="0">
+                <a:solidFill>
+                  <a:srgbClr val="1A1A2E"/>
+                </a:solidFill>
+                <a:latin typeface="Calibri" pitchFamily="34" charset="0"/>
+                <a:ea typeface="Calibri" pitchFamily="34" charset="-122"/>
+                <a:cs typeface="Calibri" pitchFamily="34" charset="-120"/>
+              </a:rPr>
+              <a:t>4. Re-tester apres correction</a:t>
+            </a:r>
+            <a:endParaRPr lang="en-US" sz="1100" dirty="0"/>
+          </a:p>
+        </p:txBody>
+      </p:sp>
+      <p:sp>
+        <p:nvSpPr>
+          <p:cNvPr id="16" name="Shape 14"/>
+          <p:cNvSpPr/>
+          <p:nvPr/>
+        </p:nvSpPr>
+        <p:spPr>
+          <a:xfrm>
+            <a:off x="457200" y="2880360"/>
+            <a:ext cx="8229600" cy="475488"/>
+          </a:xfrm>
+          <a:prstGeom prst="rect">
+            <a:avLst/>
+          </a:prstGeom>
+          <a:solidFill>
+            <a:srgbClr val="FFFFFF"/>
+          </a:solidFill>
+          <a:ln/>
+        </p:spPr>
+      </p:sp>
+      <p:sp>
+        <p:nvSpPr>
+          <p:cNvPr id="17" name="Shape 15"/>
+          <p:cNvSpPr/>
+          <p:nvPr/>
+        </p:nvSpPr>
+        <p:spPr>
+          <a:xfrm>
+            <a:off x="457200" y="2880360"/>
+            <a:ext cx="45720" cy="475488"/>
+          </a:xfrm>
+          <a:prstGeom prst="rect">
+            <a:avLst/>
+          </a:prstGeom>
+          <a:solidFill>
+            <a:srgbClr val="E65100"/>
+          </a:solidFill>
+          <a:ln/>
+        </p:spPr>
+      </p:sp>
+      <p:sp>
+        <p:nvSpPr>
+          <p:cNvPr id="18" name="Text 16"/>
+          <p:cNvSpPr/>
+          <p:nvPr/>
+        </p:nvSpPr>
+        <p:spPr>
+          <a:xfrm>
+            <a:off x="640080" y="2880360"/>
+            <a:ext cx="7863840" cy="475488"/>
+          </a:xfrm>
+          <a:prstGeom prst="rect">
+            <a:avLst/>
+          </a:prstGeom>
+          <a:noFill/>
+          <a:ln/>
+        </p:spPr>
+        <p:txBody>
+          <a:bodyPr wrap="square" lIns="0" tIns="0" rIns="0" bIns="0" rtlCol="0" anchor="ctr"/>
+          <a:lstStyle/>
+          <a:p>
+            <a:pPr indent="0" marL="0">
+              <a:buNone/>
+            </a:pPr>
+            <a:r>
+              <a:rPr lang="en-US" sz="1100" dirty="0">
+                <a:solidFill>
+                  <a:srgbClr val="1A1A2E"/>
+                </a:solidFill>
+                <a:latin typeface="Calibri" pitchFamily="34" charset="0"/>
+                <a:ea typeface="Calibri" pitchFamily="34" charset="-122"/>
+                <a:cs typeface="Calibri" pitchFamily="34" charset="-120"/>
+              </a:rPr>
+              <a:t>5. Calculer le taux de couverture final</a:t>
+            </a:r>
+            <a:endParaRPr lang="en-US" sz="1100" dirty="0"/>
+          </a:p>
+        </p:txBody>
+      </p:sp>
+      <p:sp>
+        <p:nvSpPr>
+          <p:cNvPr id="19" name="Shape 17"/>
+          <p:cNvSpPr/>
+          <p:nvPr/>
+        </p:nvSpPr>
+        <p:spPr>
+          <a:xfrm>
+            <a:off x="457200" y="3383280"/>
+            <a:ext cx="8229600" cy="475488"/>
+          </a:xfrm>
+          <a:prstGeom prst="rect">
+            <a:avLst/>
+          </a:prstGeom>
+          <a:solidFill>
+            <a:srgbClr val="FFF3E0"/>
+          </a:solidFill>
+          <a:ln/>
+        </p:spPr>
+      </p:sp>
+      <p:sp>
+        <p:nvSpPr>
+          <p:cNvPr id="20" name="Shape 18"/>
+          <p:cNvSpPr/>
+          <p:nvPr/>
+        </p:nvSpPr>
+        <p:spPr>
+          <a:xfrm>
+            <a:off x="457200" y="3383280"/>
+            <a:ext cx="45720" cy="475488"/>
+          </a:xfrm>
+          <a:prstGeom prst="rect">
+            <a:avLst/>
+          </a:prstGeom>
+          <a:solidFill>
+            <a:srgbClr val="E65100"/>
+          </a:solidFill>
+          <a:ln/>
+        </p:spPr>
+      </p:sp>
+      <p:sp>
+        <p:nvSpPr>
+          <p:cNvPr id="21" name="Text 19"/>
+          <p:cNvSpPr/>
+          <p:nvPr/>
+        </p:nvSpPr>
+        <p:spPr>
+          <a:xfrm>
+            <a:off x="640080" y="3383280"/>
+            <a:ext cx="7863840" cy="475488"/>
+          </a:xfrm>
+          <a:prstGeom prst="rect">
+            <a:avLst/>
+          </a:prstGeom>
+          <a:noFill/>
+          <a:ln/>
+        </p:spPr>
+        <p:txBody>
+          <a:bodyPr wrap="square" lIns="0" tIns="0" rIns="0" bIns="0" rtlCol="0" anchor="ctr"/>
+          <a:lstStyle/>
+          <a:p>
+            <a:pPr indent="0" marL="0">
+              <a:buNone/>
+            </a:pPr>
+            <a:r>
+              <a:rPr lang="en-US" sz="1100" dirty="0">
+                <a:solidFill>
+                  <a:srgbClr val="1A1A2E"/>
+                </a:solidFill>
+                <a:latin typeface="Calibri" pitchFamily="34" charset="0"/>
+                <a:ea typeface="Calibri" pitchFamily="34" charset="-122"/>
+                <a:cs typeface="Calibri" pitchFamily="34" charset="-120"/>
+              </a:rPr>
+              <a:t>6. Rediger l'evaluation M4 (efficacite + justification)</a:t>
+            </a:r>
+            <a:endParaRPr lang="en-US" sz="1100" dirty="0"/>
+          </a:p>
+        </p:txBody>
+      </p:sp>
+      <p:sp>
+        <p:nvSpPr>
+          <p:cNvPr id="22" name="Shape 20"/>
+          <p:cNvSpPr/>
+          <p:nvPr/>
+        </p:nvSpPr>
+        <p:spPr>
+          <a:xfrm>
+            <a:off x="457200" y="3886200"/>
+            <a:ext cx="8229600" cy="475488"/>
+          </a:xfrm>
+          <a:prstGeom prst="rect">
+            <a:avLst/>
+          </a:prstGeom>
+          <a:solidFill>
+            <a:srgbClr val="FFFFFF"/>
+          </a:solidFill>
+          <a:ln/>
+        </p:spPr>
+      </p:sp>
+      <p:sp>
+        <p:nvSpPr>
+          <p:cNvPr id="23" name="Shape 21"/>
+          <p:cNvSpPr/>
+          <p:nvPr/>
+        </p:nvSpPr>
+        <p:spPr>
+          <a:xfrm>
+            <a:off x="457200" y="3886200"/>
+            <a:ext cx="45720" cy="475488"/>
+          </a:xfrm>
+          <a:prstGeom prst="rect">
+            <a:avLst/>
+          </a:prstGeom>
+          <a:solidFill>
+            <a:srgbClr val="E65100"/>
+          </a:solidFill>
+          <a:ln/>
+        </p:spPr>
+      </p:sp>
+      <p:sp>
+        <p:nvSpPr>
+          <p:cNvPr id="24" name="Text 22"/>
+          <p:cNvSpPr/>
+          <p:nvPr/>
+        </p:nvSpPr>
+        <p:spPr>
+          <a:xfrm>
+            <a:off x="640080" y="3886200"/>
+            <a:ext cx="7863840" cy="475488"/>
+          </a:xfrm>
+          <a:prstGeom prst="rect">
+            <a:avLst/>
+          </a:prstGeom>
+          <a:noFill/>
+          <a:ln/>
+        </p:spPr>
+        <p:txBody>
+          <a:bodyPr wrap="square" lIns="0" tIns="0" rIns="0" bIns="0" rtlCol="0" anchor="ctr"/>
+          <a:lstStyle/>
+          <a:p>
+            <a:pPr indent="0" marL="0">
+              <a:buNone/>
+            </a:pPr>
+            <a:r>
+              <a:rPr lang="en-US" sz="1100" dirty="0">
+                <a:solidFill>
+                  <a:srgbClr val="1A1A2E"/>
+                </a:solidFill>
+                <a:latin typeface="Calibri" pitchFamily="34" charset="0"/>
+                <a:ea typeface="Calibri" pitchFamily="34" charset="-122"/>
+                <a:cs typeface="Calibri" pitchFamily="34" charset="-120"/>
+              </a:rPr>
+              <a:t>DEFI : 5 tests supplementaires non prevus</a:t>
+            </a:r>
+            <a:endParaRPr lang="en-US" sz="1100" dirty="0"/>
+          </a:p>
+        </p:txBody>
+      </p:sp>
+    </p:spTree>
+  </p:cSld>
+  <p:clrMapOvr>
+    <a:masterClrMapping/>
+  </p:clrMapOvr>
+</p:sld>
+</file>
+
+<file path=ppt/slides/slide7.xml><?xml version="1.0" encoding="utf-8"?>
+<p:sld xmlns:a="http://schemas.openxmlformats.org/drawingml/2006/main" xmlns:r="http://schemas.openxmlformats.org/officeDocument/2006/relationships" xmlns:p="http://schemas.openxmlformats.org/presentationml/2006/main">
+  <p:cSld name="Slide 7">
     <p:bg>
       <p:bgPr>
         <a:solidFill>
@@ -4421,8 +5037,8 @@
         </p:nvSpPr>
         <p:spPr>
           <a:xfrm>
-            <a:off x="3840480" y="457200"/>
-            <a:ext cx="1463040" cy="1097280"/>
+            <a:off x="457200" y="1828800"/>
+            <a:ext cx="8229600" cy="548640"/>
           </a:xfrm>
           <a:prstGeom prst="rect">
             <a:avLst/>
@@ -4438,43 +5054,7 @@
               <a:buNone/>
             </a:pPr>
             <a:r>
-              <a:rPr lang="en-US" sz="6000" dirty="0">
-                <a:solidFill>
-                  <a:srgbClr val="000000"/>
-                </a:solidFill>
-              </a:rPr>
-              <a:t>🎮</a:t>
-            </a:r>
-            <a:endParaRPr lang="en-US" sz="6000" dirty="0"/>
-          </a:p>
-        </p:txBody>
-      </p:sp>
-      <p:sp>
-        <p:nvSpPr>
-          <p:cNvPr id="3" name="Text 1"/>
-          <p:cNvSpPr/>
-          <p:nvPr/>
-        </p:nvSpPr>
-        <p:spPr>
-          <a:xfrm>
-            <a:off x="457200" y="1645920"/>
-            <a:ext cx="8229600" cy="548640"/>
-          </a:xfrm>
-          <a:prstGeom prst="rect">
-            <a:avLst/>
-          </a:prstGeom>
-          <a:noFill/>
-          <a:ln/>
-        </p:spPr>
-        <p:txBody>
-          <a:bodyPr wrap="square" lIns="0" tIns="0" rIns="0" bIns="0" rtlCol="0" anchor="ctr"/>
-          <a:lstStyle/>
-          <a:p>
-            <a:pPr algn="ctr" indent="0" marL="0">
-              <a:buNone/>
-            </a:pPr>
-            <a:r>
-              <a:rPr lang="en-US" sz="2600" b="1" dirty="0">
+              <a:rPr lang="en-US" sz="2400" b="1" dirty="0">
                 <a:solidFill>
                   <a:srgbClr val="FFFFFF"/>
                 </a:solidFill>
@@ -4484,20 +5064,20 @@
               </a:rPr>
               <a:t>Mini-jeu : La Chasse aux Bugs</a:t>
             </a:r>
-            <a:endParaRPr lang="en-US" sz="2600" dirty="0"/>
-          </a:p>
-        </p:txBody>
-      </p:sp>
-      <p:sp>
-        <p:nvSpPr>
-          <p:cNvPr id="4" name="Text 2"/>
-          <p:cNvSpPr/>
-          <p:nvPr/>
-        </p:nvSpPr>
-        <p:spPr>
-          <a:xfrm>
-            <a:off x="1371600" y="2286000"/>
-            <a:ext cx="6400800" cy="731520"/>
+            <a:endParaRPr lang="en-US" sz="2400" dirty="0"/>
+          </a:p>
+        </p:txBody>
+      </p:sp>
+      <p:sp>
+        <p:nvSpPr>
+          <p:cNvPr id="3" name="Text 1"/>
+          <p:cNvSpPr/>
+          <p:nvPr/>
+        </p:nvSpPr>
+        <p:spPr>
+          <a:xfrm>
+            <a:off x="1371600" y="2468880"/>
+            <a:ext cx="6400800" cy="640080"/>
           </a:xfrm>
           <a:prstGeom prst="rect">
             <a:avLst/>
@@ -4513,7 +5093,7 @@
               <a:buNone/>
             </a:pPr>
             <a:r>
-              <a:rPr lang="en-US" sz="1400" dirty="0">
+              <a:rPr lang="en-US" sz="1300" dirty="0">
                 <a:solidFill>
                   <a:srgbClr val="CCCCCC"/>
                 </a:solidFill>
@@ -4521,68 +5101,9 @@
                 <a:ea typeface="Calibri" pitchFamily="34" charset="-122"/>
                 <a:cs typeface="Calibri" pitchFamily="34" charset="-120"/>
               </a:rPr>
-              <a:t>Trouvez les 10 bugs cachés dans SwissSound !</a:t>
-            </a:r>
-            <a:endParaRPr lang="en-US" sz="1400" dirty="0"/>
-          </a:p>
-        </p:txBody>
-      </p:sp>
-      <p:sp>
-        <p:nvSpPr>
-          <p:cNvPr id="5" name="Shape 3"/>
-          <p:cNvSpPr/>
-          <p:nvPr/>
-        </p:nvSpPr>
-        <p:spPr>
-          <a:xfrm>
-            <a:off x="2286000" y="3291840"/>
-            <a:ext cx="4572000" cy="548640"/>
-          </a:xfrm>
-          <a:prstGeom prst="rect">
-            <a:avLst/>
-          </a:prstGeom>
-          <a:solidFill>
-            <a:srgbClr val="1565C0"/>
-          </a:solidFill>
-          <a:ln/>
-        </p:spPr>
-      </p:sp>
-      <p:sp>
-        <p:nvSpPr>
-          <p:cNvPr id="6" name="Text 4"/>
-          <p:cNvSpPr/>
-          <p:nvPr/>
-        </p:nvSpPr>
-        <p:spPr>
-          <a:xfrm>
-            <a:off x="2286000" y="3291840"/>
-            <a:ext cx="4572000" cy="548640"/>
-          </a:xfrm>
-          <a:prstGeom prst="rect">
-            <a:avLst/>
-          </a:prstGeom>
-          <a:noFill/>
-          <a:ln/>
-        </p:spPr>
-        <p:txBody>
-          <a:bodyPr wrap="square" lIns="0" tIns="0" rIns="0" bIns="0" rtlCol="0" anchor="ctr"/>
-          <a:lstStyle/>
-          <a:p>
-            <a:pPr algn="ctr" indent="0" marL="0">
-              <a:buNone/>
-            </a:pPr>
-            <a:r>
-              <a:rPr lang="en-US" sz="1800" b="1" dirty="0">
-                <a:solidFill>
-                  <a:srgbClr val="FFFFFF"/>
-                </a:solidFill>
-                <a:latin typeface="Trebuchet MS" pitchFamily="34" charset="0"/>
-                <a:ea typeface="Trebuchet MS" pitchFamily="34" charset="-122"/>
-                <a:cs typeface="Trebuchet MS" pitchFamily="34" charset="-120"/>
-              </a:rPr>
-              <a:t>▶  Lancer le jeu</a:t>
-            </a:r>
-            <a:endParaRPr lang="en-US" sz="1800" dirty="0"/>
+              <a:t>Trouvez les 10 bugs caches dans SwissSound</a:t>
+            </a:r>
+            <a:endParaRPr lang="en-US" sz="1300" dirty="0"/>
           </a:p>
         </p:txBody>
       </p:sp>
@@ -4594,9 +5115,9 @@
 </p:sld>
 </file>
 
-<file path=ppt/slides/slide7.xml><?xml version="1.0" encoding="utf-8"?>
+<file path=ppt/slides/slide8.xml><?xml version="1.0" encoding="utf-8"?>
 <p:sld xmlns:a="http://schemas.openxmlformats.org/drawingml/2006/main" xmlns:r="http://schemas.openxmlformats.org/officeDocument/2006/relationships" xmlns:p="http://schemas.openxmlformats.org/presentationml/2006/main">
-  <p:cSld name="Slide 7">
+  <p:cSld name="Slide 8">
     <p:bg>
       <p:bgPr>
         <a:solidFill>
@@ -4627,7 +5148,7 @@
         <p:spPr>
           <a:xfrm>
             <a:off x="457200" y="137160"/>
-            <a:ext cx="5486400" cy="411480"/>
+            <a:ext cx="5486400" cy="365760"/>
           </a:xfrm>
           <a:prstGeom prst="rect">
             <a:avLst/>
@@ -4643,7 +5164,7 @@
               <a:buNone/>
             </a:pPr>
             <a:r>
-              <a:rPr lang="en-US" sz="1800" b="1" dirty="0">
+              <a:rPr lang="en-US" sz="1600" b="1" dirty="0">
                 <a:solidFill>
                   <a:srgbClr val="BF360C"/>
                 </a:solidFill>
@@ -4651,9 +5172,9 @@
                 <a:ea typeface="Trebuchet MS" pitchFamily="34" charset="-122"/>
                 <a:cs typeface="Trebuchet MS" pitchFamily="34" charset="-120"/>
               </a:rPr>
-              <a:t>📋 Mémo Module 18</a:t>
-            </a:r>
-            <a:endParaRPr lang="en-US" sz="1800" dirty="0"/>
+              <a:t>Memo Module 18</a:t>
+            </a:r>
+            <a:endParaRPr lang="en-US" sz="1600" dirty="0"/>
           </a:p>
         </p:txBody>
       </p:sp>
@@ -4665,8 +5186,8 @@
         </p:nvSpPr>
         <p:spPr>
           <a:xfrm>
-            <a:off x="457200" y="548640"/>
-            <a:ext cx="8229600" cy="274320"/>
+            <a:off x="457200" y="640080"/>
+            <a:ext cx="2286000" cy="429768"/>
           </a:xfrm>
           <a:prstGeom prst="rect">
             <a:avLst/>
@@ -4685,67 +5206,8 @@
         </p:nvSpPr>
         <p:spPr>
           <a:xfrm>
-            <a:off x="640080" y="548640"/>
-            <a:ext cx="7772400" cy="274320"/>
-          </a:xfrm>
-          <a:prstGeom prst="rect">
-            <a:avLst/>
-          </a:prstGeom>
-          <a:noFill/>
-          <a:ln/>
-        </p:spPr>
-        <p:txBody>
-          <a:bodyPr wrap="square" lIns="0" tIns="0" rIns="0" bIns="0" rtlCol="0" anchor="ctr"/>
-          <a:lstStyle/>
-          <a:p>
-            <a:pPr indent="0" marL="0">
-              <a:buNone/>
-            </a:pPr>
-            <a:r>
-              <a:rPr lang="en-US" sz="900" b="1" dirty="0">
-                <a:solidFill>
-                  <a:srgbClr val="E65100"/>
-                </a:solidFill>
-                <a:latin typeface="Calibri" pitchFamily="34" charset="0"/>
-                <a:ea typeface="Calibri" pitchFamily="34" charset="-122"/>
-                <a:cs typeface="Calibri" pitchFamily="34" charset="-120"/>
-              </a:rPr>
-              <a:t>🔒 Déblocable après complétion</a:t>
-            </a:r>
-            <a:endParaRPr lang="en-US" sz="900" dirty="0"/>
-          </a:p>
-        </p:txBody>
-      </p:sp>
-      <p:sp>
-        <p:nvSpPr>
-          <p:cNvPr id="5" name="Shape 3"/>
-          <p:cNvSpPr/>
-          <p:nvPr/>
-        </p:nvSpPr>
-        <p:spPr>
-          <a:xfrm>
-            <a:off x="457200" y="960120"/>
-            <a:ext cx="2286000" cy="475488"/>
-          </a:xfrm>
-          <a:prstGeom prst="rect">
-            <a:avLst/>
-          </a:prstGeom>
-          <a:solidFill>
-            <a:srgbClr val="FFF3E0"/>
-          </a:solidFill>
-          <a:ln/>
-        </p:spPr>
-      </p:sp>
-      <p:sp>
-        <p:nvSpPr>
-          <p:cNvPr id="6" name="Text 4"/>
-          <p:cNvSpPr/>
-          <p:nvPr/>
-        </p:nvSpPr>
-        <p:spPr>
-          <a:xfrm>
-            <a:off x="548640" y="960120"/>
-            <a:ext cx="2103120" cy="475488"/>
+            <a:off x="548640" y="640080"/>
+            <a:ext cx="2103120" cy="429768"/>
           </a:xfrm>
           <a:prstGeom prst="rect">
             <a:avLst/>
@@ -4769,7 +5231,7 @@
                 <a:ea typeface="Trebuchet MS" pitchFamily="34" charset="-122"/>
                 <a:cs typeface="Trebuchet MS" pitchFamily="34" charset="-120"/>
               </a:rPr>
-              <a:t>Exécution</a:t>
+              <a:t>Execution</a:t>
             </a:r>
             <a:endParaRPr lang="en-US" sz="900" dirty="0"/>
           </a:p>
@@ -4777,14 +5239,14 @@
       </p:sp>
       <p:sp>
         <p:nvSpPr>
-          <p:cNvPr id="7" name="Shape 5"/>
-          <p:cNvSpPr/>
-          <p:nvPr/>
-        </p:nvSpPr>
-        <p:spPr>
-          <a:xfrm>
-            <a:off x="2743200" y="960120"/>
-            <a:ext cx="5943600" cy="475488"/>
+          <p:cNvPr id="5" name="Shape 3"/>
+          <p:cNvSpPr/>
+          <p:nvPr/>
+        </p:nvSpPr>
+        <p:spPr>
+          <a:xfrm>
+            <a:off x="2743200" y="640080"/>
+            <a:ext cx="5943600" cy="429768"/>
           </a:xfrm>
           <a:prstGeom prst="rect">
             <a:avLst/>
@@ -4797,14 +5259,14 @@
       </p:sp>
       <p:sp>
         <p:nvSpPr>
-          <p:cNvPr id="8" name="Text 6"/>
-          <p:cNvSpPr/>
-          <p:nvPr/>
-        </p:nvSpPr>
-        <p:spPr>
-          <a:xfrm>
-            <a:off x="2834640" y="960120"/>
-            <a:ext cx="5760720" cy="475488"/>
+          <p:cNvPr id="6" name="Text 4"/>
+          <p:cNvSpPr/>
+          <p:nvPr/>
+        </p:nvSpPr>
+        <p:spPr>
+          <a:xfrm>
+            <a:off x="2834640" y="640080"/>
+            <a:ext cx="5760720" cy="429768"/>
           </a:xfrm>
           <a:prstGeom prst="rect">
             <a:avLst/>
@@ -4828,7 +5290,7 @@
                 <a:ea typeface="Calibri" pitchFamily="34" charset="-122"/>
                 <a:cs typeface="Calibri" pitchFamily="34" charset="-120"/>
               </a:rPr>
-              <a:t>Cas par cas : exécuter, noter résultat, comparer, statut OK/KO</a:t>
+              <a:t>Cas par cas, documenter resultat, statut OK/KO</a:t>
             </a:r>
             <a:endParaRPr lang="en-US" sz="900" dirty="0"/>
           </a:p>
@@ -4836,14 +5298,14 @@
       </p:sp>
       <p:sp>
         <p:nvSpPr>
-          <p:cNvPr id="9" name="Shape 7"/>
-          <p:cNvSpPr/>
-          <p:nvPr/>
-        </p:nvSpPr>
-        <p:spPr>
-          <a:xfrm>
-            <a:off x="457200" y="1463040"/>
-            <a:ext cx="2286000" cy="475488"/>
+          <p:cNvPr id="7" name="Shape 5"/>
+          <p:cNvSpPr/>
+          <p:nvPr/>
+        </p:nvSpPr>
+        <p:spPr>
+          <a:xfrm>
+            <a:off x="457200" y="1097280"/>
+            <a:ext cx="2286000" cy="429768"/>
           </a:xfrm>
           <a:prstGeom prst="rect">
             <a:avLst/>
@@ -4856,14 +5318,14 @@
       </p:sp>
       <p:sp>
         <p:nvSpPr>
-          <p:cNvPr id="10" name="Text 8"/>
-          <p:cNvSpPr/>
-          <p:nvPr/>
-        </p:nvSpPr>
-        <p:spPr>
-          <a:xfrm>
-            <a:off x="548640" y="1463040"/>
-            <a:ext cx="2103120" cy="475488"/>
+          <p:cNvPr id="8" name="Text 6"/>
+          <p:cNvSpPr/>
+          <p:nvPr/>
+        </p:nvSpPr>
+        <p:spPr>
+          <a:xfrm>
+            <a:off x="548640" y="1097280"/>
+            <a:ext cx="2103120" cy="429768"/>
           </a:xfrm>
           <a:prstGeom prst="rect">
             <a:avLst/>
@@ -4895,14 +5357,14 @@
       </p:sp>
       <p:sp>
         <p:nvSpPr>
-          <p:cNvPr id="11" name="Shape 9"/>
-          <p:cNvSpPr/>
-          <p:nvPr/>
-        </p:nvSpPr>
-        <p:spPr>
-          <a:xfrm>
-            <a:off x="2743200" y="1463040"/>
-            <a:ext cx="5943600" cy="475488"/>
+          <p:cNvPr id="9" name="Shape 7"/>
+          <p:cNvSpPr/>
+          <p:nvPr/>
+        </p:nvSpPr>
+        <p:spPr>
+          <a:xfrm>
+            <a:off x="2743200" y="1097280"/>
+            <a:ext cx="5943600" cy="429768"/>
           </a:xfrm>
           <a:prstGeom prst="rect">
             <a:avLst/>
@@ -4915,14 +5377,14 @@
       </p:sp>
       <p:sp>
         <p:nvSpPr>
-          <p:cNvPr id="12" name="Text 10"/>
-          <p:cNvSpPr/>
-          <p:nvPr/>
-        </p:nvSpPr>
-        <p:spPr>
-          <a:xfrm>
-            <a:off x="2834640" y="1463040"/>
-            <a:ext cx="5760720" cy="475488"/>
+          <p:cNvPr id="10" name="Text 8"/>
+          <p:cNvSpPr/>
+          <p:nvPr/>
+        </p:nvSpPr>
+        <p:spPr>
+          <a:xfrm>
+            <a:off x="2834640" y="1097280"/>
+            <a:ext cx="5760720" cy="429768"/>
           </a:xfrm>
           <a:prstGeom prst="rect">
             <a:avLst/>
@@ -4946,7 +5408,7 @@
                 <a:ea typeface="Calibri" pitchFamily="34" charset="-122"/>
                 <a:cs typeface="Calibri" pitchFamily="34" charset="-120"/>
               </a:rPr>
-              <a:t>Documenter : description, cause, priorité, correction, re-test</a:t>
+              <a:t>Description, cause, priorite, correction, re-test</a:t>
             </a:r>
             <a:endParaRPr lang="en-US" sz="900" dirty="0"/>
           </a:p>
@@ -4954,14 +5416,14 @@
       </p:sp>
       <p:sp>
         <p:nvSpPr>
-          <p:cNvPr id="13" name="Shape 11"/>
-          <p:cNvSpPr/>
-          <p:nvPr/>
-        </p:nvSpPr>
-        <p:spPr>
-          <a:xfrm>
-            <a:off x="457200" y="1965960"/>
-            <a:ext cx="2286000" cy="475488"/>
+          <p:cNvPr id="11" name="Shape 9"/>
+          <p:cNvSpPr/>
+          <p:nvPr/>
+        </p:nvSpPr>
+        <p:spPr>
+          <a:xfrm>
+            <a:off x="457200" y="1554480"/>
+            <a:ext cx="2286000" cy="429768"/>
           </a:xfrm>
           <a:prstGeom prst="rect">
             <a:avLst/>
@@ -4974,14 +5436,14 @@
       </p:sp>
       <p:sp>
         <p:nvSpPr>
-          <p:cNvPr id="14" name="Text 12"/>
-          <p:cNvSpPr/>
-          <p:nvPr/>
-        </p:nvSpPr>
-        <p:spPr>
-          <a:xfrm>
-            <a:off x="548640" y="1965960"/>
-            <a:ext cx="2103120" cy="475488"/>
+          <p:cNvPr id="12" name="Text 10"/>
+          <p:cNvSpPr/>
+          <p:nvPr/>
+        </p:nvSpPr>
+        <p:spPr>
+          <a:xfrm>
+            <a:off x="548640" y="1554480"/>
+            <a:ext cx="2103120" cy="429768"/>
           </a:xfrm>
           <a:prstGeom prst="rect">
             <a:avLst/>
@@ -5005,7 +5467,7 @@
                 <a:ea typeface="Trebuchet MS" pitchFamily="34" charset="-122"/>
                 <a:cs typeface="Trebuchet MS" pitchFamily="34" charset="-120"/>
               </a:rPr>
-              <a:t>Régression</a:t>
+              <a:t>Regression</a:t>
             </a:r>
             <a:endParaRPr lang="en-US" sz="900" dirty="0"/>
           </a:p>
@@ -5013,14 +5475,14 @@
       </p:sp>
       <p:sp>
         <p:nvSpPr>
-          <p:cNvPr id="15" name="Shape 13"/>
-          <p:cNvSpPr/>
-          <p:nvPr/>
-        </p:nvSpPr>
-        <p:spPr>
-          <a:xfrm>
-            <a:off x="2743200" y="1965960"/>
-            <a:ext cx="5943600" cy="475488"/>
+          <p:cNvPr id="13" name="Shape 11"/>
+          <p:cNvSpPr/>
+          <p:nvPr/>
+        </p:nvSpPr>
+        <p:spPr>
+          <a:xfrm>
+            <a:off x="2743200" y="1554480"/>
+            <a:ext cx="5943600" cy="429768"/>
           </a:xfrm>
           <a:prstGeom prst="rect">
             <a:avLst/>
@@ -5033,14 +5495,14 @@
       </p:sp>
       <p:sp>
         <p:nvSpPr>
-          <p:cNvPr id="16" name="Text 14"/>
-          <p:cNvSpPr/>
-          <p:nvPr/>
-        </p:nvSpPr>
-        <p:spPr>
-          <a:xfrm>
-            <a:off x="2834640" y="1965960"/>
-            <a:ext cx="5760720" cy="475488"/>
+          <p:cNvPr id="14" name="Text 12"/>
+          <p:cNvSpPr/>
+          <p:nvPr/>
+        </p:nvSpPr>
+        <p:spPr>
+          <a:xfrm>
+            <a:off x="2834640" y="1554480"/>
+            <a:ext cx="5760720" cy="429768"/>
           </a:xfrm>
           <a:prstGeom prst="rect">
             <a:avLst/>
@@ -5064,7 +5526,7 @@
                 <a:ea typeface="Calibri" pitchFamily="34" charset="-122"/>
                 <a:cs typeface="Calibri" pitchFamily="34" charset="-120"/>
               </a:rPr>
-              <a:t>Après correction, vérifier que les autres tests marchent encore</a:t>
+              <a:t>Apres correction, les autres tests marchent encore ?</a:t>
             </a:r>
             <a:endParaRPr lang="en-US" sz="900" dirty="0"/>
           </a:p>
@@ -5072,14 +5534,14 @@
       </p:sp>
       <p:sp>
         <p:nvSpPr>
-          <p:cNvPr id="17" name="Shape 15"/>
-          <p:cNvSpPr/>
-          <p:nvPr/>
-        </p:nvSpPr>
-        <p:spPr>
-          <a:xfrm>
-            <a:off x="457200" y="2468880"/>
-            <a:ext cx="2286000" cy="475488"/>
+          <p:cNvPr id="15" name="Shape 13"/>
+          <p:cNvSpPr/>
+          <p:nvPr/>
+        </p:nvSpPr>
+        <p:spPr>
+          <a:xfrm>
+            <a:off x="457200" y="2011680"/>
+            <a:ext cx="2286000" cy="429768"/>
           </a:xfrm>
           <a:prstGeom prst="rect">
             <a:avLst/>
@@ -5092,14 +5554,14 @@
       </p:sp>
       <p:sp>
         <p:nvSpPr>
-          <p:cNvPr id="18" name="Text 16"/>
-          <p:cNvSpPr/>
-          <p:nvPr/>
-        </p:nvSpPr>
-        <p:spPr>
-          <a:xfrm>
-            <a:off x="548640" y="2468880"/>
-            <a:ext cx="2103120" cy="475488"/>
+          <p:cNvPr id="16" name="Text 14"/>
+          <p:cNvSpPr/>
+          <p:nvPr/>
+        </p:nvSpPr>
+        <p:spPr>
+          <a:xfrm>
+            <a:off x="548640" y="2011680"/>
+            <a:ext cx="2103120" cy="429768"/>
           </a:xfrm>
           <a:prstGeom prst="rect">
             <a:avLst/>
@@ -5131,14 +5593,14 @@
       </p:sp>
       <p:sp>
         <p:nvSpPr>
-          <p:cNvPr id="19" name="Shape 17"/>
-          <p:cNvSpPr/>
-          <p:nvPr/>
-        </p:nvSpPr>
-        <p:spPr>
-          <a:xfrm>
-            <a:off x="2743200" y="2468880"/>
-            <a:ext cx="5943600" cy="475488"/>
+          <p:cNvPr id="17" name="Shape 15"/>
+          <p:cNvSpPr/>
+          <p:nvPr/>
+        </p:nvSpPr>
+        <p:spPr>
+          <a:xfrm>
+            <a:off x="2743200" y="2011680"/>
+            <a:ext cx="5943600" cy="429768"/>
           </a:xfrm>
           <a:prstGeom prst="rect">
             <a:avLst/>
@@ -5151,14 +5613,14 @@
       </p:sp>
       <p:sp>
         <p:nvSpPr>
-          <p:cNvPr id="20" name="Text 18"/>
-          <p:cNvSpPr/>
-          <p:nvPr/>
-        </p:nvSpPr>
-        <p:spPr>
-          <a:xfrm>
-            <a:off x="2834640" y="2468880"/>
-            <a:ext cx="5760720" cy="475488"/>
+          <p:cNvPr id="18" name="Text 16"/>
+          <p:cNvSpPr/>
+          <p:nvPr/>
+        </p:nvSpPr>
+        <p:spPr>
+          <a:xfrm>
+            <a:off x="2834640" y="2011680"/>
+            <a:ext cx="5760720" cy="429768"/>
           </a:xfrm>
           <a:prstGeom prst="rect">
             <a:avLst/>
@@ -5182,7 +5644,7 @@
                 <a:ea typeface="Calibri" pitchFamily="34" charset="-122"/>
                 <a:cs typeface="Calibri" pitchFamily="34" charset="-120"/>
               </a:rPr>
-              <a:t>Nb tests / nb fonctionnalités — viser 100%</a:t>
+              <a:t>Nb tests / nb fonctionnalites — viser 100%</a:t>
             </a:r>
             <a:endParaRPr lang="en-US" sz="900" dirty="0"/>
           </a:p>
@@ -5190,14 +5652,14 @@
       </p:sp>
       <p:sp>
         <p:nvSpPr>
-          <p:cNvPr id="21" name="Shape 19"/>
-          <p:cNvSpPr/>
-          <p:nvPr/>
-        </p:nvSpPr>
-        <p:spPr>
-          <a:xfrm>
-            <a:off x="457200" y="2971800"/>
-            <a:ext cx="2286000" cy="475488"/>
+          <p:cNvPr id="19" name="Shape 17"/>
+          <p:cNvSpPr/>
+          <p:nvPr/>
+        </p:nvSpPr>
+        <p:spPr>
+          <a:xfrm>
+            <a:off x="457200" y="2468880"/>
+            <a:ext cx="2286000" cy="429768"/>
           </a:xfrm>
           <a:prstGeom prst="rect">
             <a:avLst/>
@@ -5210,14 +5672,14 @@
       </p:sp>
       <p:sp>
         <p:nvSpPr>
-          <p:cNvPr id="22" name="Text 20"/>
-          <p:cNvSpPr/>
-          <p:nvPr/>
-        </p:nvSpPr>
-        <p:spPr>
-          <a:xfrm>
-            <a:off x="548640" y="2971800"/>
-            <a:ext cx="2103120" cy="475488"/>
+          <p:cNvPr id="20" name="Text 18"/>
+          <p:cNvSpPr/>
+          <p:nvPr/>
+        </p:nvSpPr>
+        <p:spPr>
+          <a:xfrm>
+            <a:off x="548640" y="2468880"/>
+            <a:ext cx="2103120" cy="429768"/>
           </a:xfrm>
           <a:prstGeom prst="rect">
             <a:avLst/>
@@ -5249,14 +5711,14 @@
       </p:sp>
       <p:sp>
         <p:nvSpPr>
-          <p:cNvPr id="23" name="Shape 21"/>
-          <p:cNvSpPr/>
-          <p:nvPr/>
-        </p:nvSpPr>
-        <p:spPr>
-          <a:xfrm>
-            <a:off x="2743200" y="2971800"/>
-            <a:ext cx="5943600" cy="475488"/>
+          <p:cNvPr id="21" name="Shape 19"/>
+          <p:cNvSpPr/>
+          <p:nvPr/>
+        </p:nvSpPr>
+        <p:spPr>
+          <a:xfrm>
+            <a:off x="2743200" y="2468880"/>
+            <a:ext cx="5943600" cy="429768"/>
           </a:xfrm>
           <a:prstGeom prst="rect">
             <a:avLst/>
@@ -5269,14 +5731,14 @@
       </p:sp>
       <p:sp>
         <p:nvSpPr>
-          <p:cNvPr id="24" name="Text 22"/>
-          <p:cNvSpPr/>
-          <p:nvPr/>
-        </p:nvSpPr>
-        <p:spPr>
-          <a:xfrm>
-            <a:off x="2834640" y="2971800"/>
-            <a:ext cx="5760720" cy="475488"/>
+          <p:cNvPr id="22" name="Text 20"/>
+          <p:cNvSpPr/>
+          <p:nvPr/>
+        </p:nvSpPr>
+        <p:spPr>
+          <a:xfrm>
+            <a:off x="2834640" y="2468880"/>
+            <a:ext cx="5760720" cy="429768"/>
           </a:xfrm>
           <a:prstGeom prst="rect">
             <a:avLst/>
@@ -5300,7 +5762,7 @@
                 <a:ea typeface="Calibri" pitchFamily="34" charset="-122"/>
                 <a:cs typeface="Calibri" pitchFamily="34" charset="-120"/>
               </a:rPr>
-              <a:t>Justifier le CHOIX des données + analyser l'efficacité</a:t>
+              <a:t>Justifier le CHOIX des donnees + analyser efficacite</a:t>
             </a:r>
             <a:endParaRPr lang="en-US" sz="900" dirty="0"/>
           </a:p>
